--- a/lectures/09/Multi-File Programs.pptx
+++ b/lectures/09/Multi-File Programs.pptx
@@ -225,7 +225,7 @@
           <a:p>
             <a:fld id="{E33BFEAB-032F-451F-BEA8-EF3C36DEA968}" type="datetimeFigureOut">
               <a:rPr lang="en-US" smtClean="0"/>
-              <a:t>4/4/2026</a:t>
+              <a:t>6/24/2026</a:t>
             </a:fld>
             <a:endParaRPr lang="en-US"/>
           </a:p>
@@ -536,107 +536,7 @@
           <a:bodyPr/>
           <a:lstStyle/>
           <a:p>
-            <a:r>
-              <a:rPr lang="ru-RU" dirty="0"/>
-              <a:t>Рассмотрим ситуацию, когда вся программа реализована в одном исходном файле.</a:t>
-            </a:r>
-          </a:p>
-          <a:p>
-            <a:r>
-              <a:rPr lang="ru-RU" dirty="0"/>
-              <a:t>На начальном этапе разработки это не вызывает проблем: программа компактна, структура очевидна, все функции находятся в одном месте. Однако по мере роста функциональности объём кода существенно увеличивается.</a:t>
-            </a:r>
-            <a:endParaRPr lang="en-US" dirty="0"/>
-          </a:p>
-          <a:p>
-            <a:endParaRPr lang="ru-RU" dirty="0"/>
-          </a:p>
-          <a:p>
-            <a:r>
-              <a:rPr lang="ru-RU" dirty="0"/>
-              <a:t>В одном файле начинают сосредотачиваться:</a:t>
-            </a:r>
-          </a:p>
-          <a:p>
-            <a:r>
-              <a:rPr lang="ru-RU" dirty="0"/>
-              <a:t>— функции ввода-вывода</a:t>
-            </a:r>
-            <a:br>
-              <a:rPr lang="ru-RU" dirty="0"/>
-            </a:br>
-            <a:r>
-              <a:rPr lang="ru-RU" dirty="0"/>
-              <a:t>— функции обработки данных</a:t>
-            </a:r>
-            <a:br>
-              <a:rPr lang="ru-RU" dirty="0"/>
-            </a:br>
-            <a:r>
-              <a:rPr lang="ru-RU" dirty="0"/>
-              <a:t>— вспомогательные алгоритмы</a:t>
-            </a:r>
-            <a:br>
-              <a:rPr lang="ru-RU" dirty="0"/>
-            </a:br>
-            <a:r>
-              <a:rPr lang="ru-RU" dirty="0"/>
-              <a:t>— основная логика программы</a:t>
-            </a:r>
-            <a:endParaRPr lang="en-US" dirty="0"/>
-          </a:p>
-          <a:p>
-            <a:endParaRPr lang="ru-RU" dirty="0"/>
-          </a:p>
-          <a:p>
-            <a:r>
-              <a:rPr lang="ru-RU" dirty="0"/>
-              <a:t>Это приводит к ряду системных проблем.</a:t>
-            </a:r>
-            <a:endParaRPr lang="en-US" dirty="0"/>
-          </a:p>
-          <a:p>
-            <a:endParaRPr lang="ru-RU" dirty="0"/>
-          </a:p>
-          <a:p>
-            <a:r>
-              <a:rPr lang="ru-RU" dirty="0"/>
-              <a:t>Во-первых, снижается читаемость кода. Поиск нужной функции или участка программы становится трудоёмким.</a:t>
-            </a:r>
-          </a:p>
-          <a:p>
-            <a:endParaRPr lang="en-US" dirty="0"/>
-          </a:p>
-          <a:p>
-            <a:r>
-              <a:rPr lang="ru-RU" dirty="0"/>
-              <a:t>Во-вторых, возрастает вероятность ошибок. Изменение одной части программы может неявно повлиять на другую, поскольку отсутствует чёткое разделение ответственности.</a:t>
-            </a:r>
-          </a:p>
-          <a:p>
-            <a:endParaRPr lang="en-US" dirty="0"/>
-          </a:p>
-          <a:p>
-            <a:r>
-              <a:rPr lang="ru-RU" dirty="0"/>
-              <a:t>В-третьих, затрудняется коллективная разработка. При работе нескольких разработчиков с одним файлом неизбежно возникают конфликты изменений.</a:t>
-            </a:r>
-            <a:endParaRPr lang="en-US" dirty="0"/>
-          </a:p>
-          <a:p>
-            <a:endParaRPr lang="ru-RU" dirty="0"/>
-          </a:p>
-          <a:p>
-            <a:r>
-              <a:rPr lang="ru-RU" dirty="0"/>
-              <a:t>Таким образом, по мере роста программы использование одного файла становится архитектурным ограничением.</a:t>
-            </a:r>
-          </a:p>
-          <a:p>
-            <a:br>
-              <a:rPr lang="ru-RU" dirty="0"/>
-            </a:br>
-            <a:endParaRPr lang="en-US" dirty="0"/>
+            <a:endParaRPr lang="en-US"/>
           </a:p>
         </p:txBody>
       </p:sp>
@@ -657,7 +557,7 @@
           <a:p>
             <a:fld id="{34FEEA18-11E3-42C4-8C85-DE023A8E1E76}" type="slidenum">
               <a:rPr lang="en-US" smtClean="0"/>
-              <a:t>2</a:t>
+              <a:t>1</a:t>
             </a:fld>
             <a:endParaRPr lang="en-US"/>
           </a:p>
@@ -666,7 +566,7 @@
     </p:spTree>
     <p:extLst>
       <p:ext uri="{BB962C8B-B14F-4D97-AF65-F5344CB8AC3E}">
-        <p14:creationId xmlns:p14="http://schemas.microsoft.com/office/powerpoint/2010/main" val="681793956"/>
+        <p14:creationId xmlns:p14="http://schemas.microsoft.com/office/powerpoint/2010/main" val="406756151"/>
       </p:ext>
     </p:extLst>
   </p:cSld>
@@ -722,13 +622,16 @@
           <a:p>
             <a:r>
               <a:rPr lang="ru-RU" dirty="0"/>
-              <a:t>Рассмотрим небольшой пример модуля.</a:t>
-            </a:r>
-          </a:p>
-          <a:p>
-            <a:r>
-              <a:rPr lang="ru-RU" dirty="0"/>
-              <a:t>В заголовочном файле объявлена функция </a:t>
+              <a:t>Рассмотрим, как в языке C регулируется область видимости между файлами.</a:t>
+            </a:r>
+          </a:p>
+          <a:p>
+            <a:endParaRPr lang="ru-RU" dirty="0"/>
+          </a:p>
+          <a:p>
+            <a:r>
+              <a:rPr lang="ru-RU" dirty="0"/>
+              <a:t>Если глобальная переменная или функция объявлена без дополнительных ключевых слов, она имеет внешнюю область видимости. Это означает, что к ней можно обратиться из других файлов, используя ключевое слово </a:t>
             </a:r>
             <a:r>
               <a:rPr lang="ru-RU" sz="1200" kern="1200" dirty="0" err="1">
@@ -739,17 +642,39 @@
                 <a:ea typeface="+mn-ea"/>
                 <a:cs typeface="+mn-cs"/>
               </a:rPr>
-              <a:t>Abs</a:t>
-            </a:r>
-            <a:r>
-              <a:rPr lang="ru-RU" dirty="0"/>
-              <a:t>. Это функция, которая входит в интерфейс модуля и предназначена для использования из других файлов.</a:t>
-            </a:r>
-          </a:p>
-          <a:p>
-            <a:r>
-              <a:rPr lang="ru-RU" dirty="0"/>
-              <a:t>В файле </a:t>
+              <a:t>extern</a:t>
+            </a:r>
+            <a:r>
+              <a:rPr lang="ru-RU" dirty="0"/>
+              <a:t>.</a:t>
+            </a:r>
+            <a:endParaRPr lang="en-US" dirty="0"/>
+          </a:p>
+          <a:p>
+            <a:endParaRPr lang="ru-RU" dirty="0"/>
+          </a:p>
+          <a:p>
+            <a:r>
+              <a:rPr lang="ru-RU" dirty="0"/>
+              <a:t>Таким образом, разные модули могут разделять общие данные или вызывать функции друг друга.</a:t>
+            </a:r>
+          </a:p>
+          <a:p>
+            <a:endParaRPr lang="en-US" dirty="0"/>
+          </a:p>
+          <a:p>
+            <a:r>
+              <a:rPr lang="ru-RU" dirty="0"/>
+              <a:t>Однако такой подход не всегда желателен. Если внутренняя переменная или вспомогательная функция используются только внутри одного модуля, нет необходимости делать их доступными извне.</a:t>
+            </a:r>
+          </a:p>
+          <a:p>
+            <a:endParaRPr lang="ru-RU" dirty="0"/>
+          </a:p>
+          <a:p>
+            <a:r>
+              <a:rPr lang="ru-RU" dirty="0"/>
+              <a:t>Для ограничения области видимости используется ключевое слово </a:t>
             </a:r>
             <a:r>
               <a:rPr lang="ru-RU" sz="1200" kern="1200" dirty="0" err="1">
@@ -760,11 +685,11 @@
                 <a:ea typeface="+mn-ea"/>
                 <a:cs typeface="+mn-cs"/>
               </a:rPr>
-              <a:t>math_utils.c</a:t>
-            </a:r>
-            <a:r>
-              <a:rPr lang="ru-RU" dirty="0"/>
-              <a:t> находится реализация. Здесь, помимо функции </a:t>
+              <a:t>static</a:t>
+            </a:r>
+            <a:r>
+              <a:rPr lang="ru-RU" dirty="0"/>
+              <a:t>. Переменные и функции, объявленные как </a:t>
             </a:r>
             <a:r>
               <a:rPr lang="ru-RU" sz="1200" kern="1200" dirty="0" err="1">
@@ -775,14 +700,14 @@
                 <a:ea typeface="+mn-ea"/>
                 <a:cs typeface="+mn-cs"/>
               </a:rPr>
-              <a:t>Abs</a:t>
-            </a:r>
-            <a:r>
-              <a:rPr lang="ru-RU" dirty="0"/>
-              <a:t>, определена вспомогательная функция </a:t>
-            </a:r>
-            <a:r>
-              <a:rPr lang="ru-RU" sz="1200" kern="1200" dirty="0" err="1">
+              <a:t>static</a:t>
+            </a:r>
+            <a:r>
+              <a:rPr lang="ru-RU" dirty="0"/>
+              <a:t>, видны только внутри текущего </a:t>
+            </a:r>
+            <a:r>
+              <a:rPr lang="ru-RU" sz="1200" kern="1200" dirty="0">
                 <a:solidFill>
                   <a:schemeClr val="tx1"/>
                 </a:solidFill>
@@ -790,11 +715,23 @@
                 <a:ea typeface="+mn-ea"/>
                 <a:cs typeface="+mn-cs"/>
               </a:rPr>
-              <a:t>Sign</a:t>
-            </a:r>
-            <a:r>
-              <a:rPr lang="ru-RU" dirty="0"/>
-              <a:t>.</a:t>
+              <a:t>.c</a:t>
+            </a:r>
+            <a:r>
+              <a:rPr lang="ru-RU" dirty="0"/>
+              <a:t> файла и недоступны другим модулям.</a:t>
+            </a:r>
+          </a:p>
+          <a:p>
+            <a:r>
+              <a:rPr lang="ru-RU" dirty="0"/>
+              <a:t>Это позволяет скрыть детали реализации и избежать случайного использования внутренних элементов модуля извне.</a:t>
+            </a:r>
+          </a:p>
+          <a:p>
+            <a:r>
+              <a:rPr lang="ru-RU" dirty="0"/>
+              <a:t>Таким образом, в языке C можно управлять видимостью на уровне файлов: либо делать сущности доступными всему проекту, либо ограничивать их текущим модулем.</a:t>
             </a:r>
           </a:p>
           <a:p>
@@ -803,7 +740,7 @@
           <a:p>
             <a:r>
               <a:rPr lang="ru-RU" dirty="0"/>
-              <a:t>Обратите внимание, что функция </a:t>
+              <a:t>Рекомендуемый подход — делать доступными только те функции и данные, которые входят в интерфейс модуля, и скрывать всё остальное с помощью </a:t>
             </a:r>
             <a:r>
               <a:rPr lang="ru-RU" sz="1200" kern="1200" dirty="0" err="1">
@@ -814,158 +751,11 @@
                 <a:ea typeface="+mn-ea"/>
                 <a:cs typeface="+mn-cs"/>
               </a:rPr>
-              <a:t>Sign</a:t>
-            </a:r>
-            <a:r>
-              <a:rPr lang="ru-RU" dirty="0"/>
-              <a:t> объявлена с ключевым словом </a:t>
-            </a:r>
-            <a:r>
-              <a:rPr lang="ru-RU" sz="1200" kern="1200" dirty="0" err="1">
-                <a:solidFill>
-                  <a:schemeClr val="tx1"/>
-                </a:solidFill>
-                <a:latin typeface="+mn-lt"/>
-                <a:ea typeface="+mn-ea"/>
-                <a:cs typeface="+mn-cs"/>
-              </a:rPr>
               <a:t>static</a:t>
             </a:r>
             <a:r>
               <a:rPr lang="ru-RU" dirty="0"/>
-              <a:t>. Это означает, что она доступна только внутри текущего </a:t>
-            </a:r>
-            <a:r>
-              <a:rPr lang="ru-RU" sz="1200" kern="1200" dirty="0">
-                <a:solidFill>
-                  <a:schemeClr val="tx1"/>
-                </a:solidFill>
-                <a:latin typeface="+mn-lt"/>
-                <a:ea typeface="+mn-ea"/>
-                <a:cs typeface="+mn-cs"/>
-              </a:rPr>
-              <a:t>.c</a:t>
-            </a:r>
-            <a:r>
-              <a:rPr lang="ru-RU" dirty="0"/>
-              <a:t> файла и не может быть вызвана из других модулей.</a:t>
-            </a:r>
-          </a:p>
-          <a:p>
-            <a:r>
-              <a:rPr lang="ru-RU" dirty="0"/>
-              <a:t>Такое решение оправдано, поскольку </a:t>
-            </a:r>
-            <a:r>
-              <a:rPr lang="ru-RU" sz="1200" kern="1200" dirty="0" err="1">
-                <a:solidFill>
-                  <a:schemeClr val="tx1"/>
-                </a:solidFill>
-                <a:latin typeface="+mn-lt"/>
-                <a:ea typeface="+mn-ea"/>
-                <a:cs typeface="+mn-cs"/>
-              </a:rPr>
-              <a:t>Sign</a:t>
-            </a:r>
-            <a:r>
-              <a:rPr lang="ru-RU" dirty="0"/>
-              <a:t> является внутренней деталью реализации. Пользователю модуля не нужно знать о её существовании — ему достаточно функции </a:t>
-            </a:r>
-            <a:r>
-              <a:rPr lang="ru-RU" sz="1200" kern="1200" dirty="0" err="1">
-                <a:solidFill>
-                  <a:schemeClr val="tx1"/>
-                </a:solidFill>
-                <a:latin typeface="+mn-lt"/>
-                <a:ea typeface="+mn-ea"/>
-                <a:cs typeface="+mn-cs"/>
-              </a:rPr>
-              <a:t>Abs</a:t>
-            </a:r>
-            <a:r>
-              <a:rPr lang="ru-RU" dirty="0"/>
               <a:t>.</a:t>
-            </a:r>
-          </a:p>
-          <a:p>
-            <a:endParaRPr lang="ru-RU" dirty="0"/>
-          </a:p>
-          <a:p>
-            <a:r>
-              <a:rPr lang="ru-RU" dirty="0"/>
-              <a:t>Использование </a:t>
-            </a:r>
-            <a:r>
-              <a:rPr lang="ru-RU" sz="1200" kern="1200" dirty="0" err="1">
-                <a:solidFill>
-                  <a:schemeClr val="tx1"/>
-                </a:solidFill>
-                <a:latin typeface="+mn-lt"/>
-                <a:ea typeface="+mn-ea"/>
-                <a:cs typeface="+mn-cs"/>
-              </a:rPr>
-              <a:t>static</a:t>
-            </a:r>
-            <a:r>
-              <a:rPr lang="ru-RU" dirty="0"/>
-              <a:t> позволяет явно разделить интерфейс и внутреннюю реализацию: снаружи видна только одна функция, а вспомогательная логика скрыта внутри модуля.</a:t>
-            </a:r>
-          </a:p>
-          <a:p>
-            <a:r>
-              <a:rPr lang="ru-RU" dirty="0"/>
-              <a:t>Кроме того, у </a:t>
-            </a:r>
-            <a:r>
-              <a:rPr lang="ru-RU" sz="1200" kern="1200" dirty="0" err="1">
-                <a:solidFill>
-                  <a:schemeClr val="tx1"/>
-                </a:solidFill>
-                <a:latin typeface="+mn-lt"/>
-                <a:ea typeface="+mn-ea"/>
-                <a:cs typeface="+mn-cs"/>
-              </a:rPr>
-              <a:t>static</a:t>
-            </a:r>
-            <a:r>
-              <a:rPr lang="ru-RU" dirty="0"/>
-              <a:t> есть ещё одно преимущество. Поскольку компилятор знает, что такая функция используется только внутри одного файла, он может более свободно её оптимизировать.</a:t>
-            </a:r>
-          </a:p>
-          <a:p>
-            <a:r>
-              <a:rPr lang="ru-RU" dirty="0"/>
-              <a:t>Например, он может встроить её код непосредственно в место вызова, изменить способ передачи аргументов или даже полностью убрать вызов функции как отдельную сущность.</a:t>
-            </a:r>
-          </a:p>
-          <a:p>
-            <a:endParaRPr lang="ru-RU" dirty="0"/>
-          </a:p>
-          <a:p>
-            <a:r>
-              <a:rPr lang="ru-RU" dirty="0"/>
-              <a:t>Проще говоря, компилятору не нужно учитывать, что эту функцию могут вызывать из других частей программы, и поэтому он может генерировать более эффективный код.</a:t>
-            </a:r>
-          </a:p>
-          <a:p>
-            <a:r>
-              <a:rPr lang="ru-RU" dirty="0"/>
-              <a:t>Таким образом, </a:t>
-            </a:r>
-            <a:r>
-              <a:rPr lang="ru-RU" sz="1200" kern="1200" dirty="0" err="1">
-                <a:solidFill>
-                  <a:schemeClr val="tx1"/>
-                </a:solidFill>
-                <a:latin typeface="+mn-lt"/>
-                <a:ea typeface="+mn-ea"/>
-                <a:cs typeface="+mn-cs"/>
-              </a:rPr>
-              <a:t>static</a:t>
-            </a:r>
-            <a:r>
-              <a:rPr lang="ru-RU" dirty="0"/>
-              <a:t> одновременно решает две задачи: улучшает структуру программы и даёт компилятору дополнительные возможности для оптимизации.</a:t>
             </a:r>
           </a:p>
           <a:p>
@@ -990,7 +780,7 @@
           <a:p>
             <a:fld id="{34FEEA18-11E3-42C4-8C85-DE023A8E1E76}" type="slidenum">
               <a:rPr lang="en-US" smtClean="0"/>
-              <a:t>11</a:t>
+              <a:t>10</a:t>
             </a:fld>
             <a:endParaRPr lang="en-US"/>
           </a:p>
@@ -999,7 +789,7 @@
     </p:spTree>
     <p:extLst>
       <p:ext uri="{BB962C8B-B14F-4D97-AF65-F5344CB8AC3E}">
-        <p14:creationId xmlns:p14="http://schemas.microsoft.com/office/powerpoint/2010/main" val="568413835"/>
+        <p14:creationId xmlns:p14="http://schemas.microsoft.com/office/powerpoint/2010/main" val="371928823"/>
       </p:ext>
     </p:extLst>
   </p:cSld>
@@ -1055,46 +845,16 @@
           <a:p>
             <a:r>
               <a:rPr lang="ru-RU" dirty="0"/>
-              <a:t>Рассмотрим ситуацию с очень короткими функциями.</a:t>
-            </a:r>
-          </a:p>
-          <a:p>
-            <a:r>
-              <a:rPr lang="ru-RU" dirty="0"/>
-              <a:t>Например, функция вычисления модуля числа состоит буквально из одной строки. Однако при её использовании компилятор всё равно генерирует полноценный вызов функции.</a:t>
-            </a:r>
-            <a:endParaRPr lang="en-US" dirty="0"/>
-          </a:p>
-          <a:p>
-            <a:endParaRPr lang="ru-RU" dirty="0"/>
-          </a:p>
-          <a:p>
-            <a:r>
-              <a:rPr lang="ru-RU" dirty="0"/>
-              <a:t>Это означает, что перед выполнением тела функции происходит переход к ней, а затем возврат обратно. Такие операции требуют дополнительных инструкций.</a:t>
-            </a:r>
-            <a:endParaRPr lang="en-US" dirty="0"/>
-          </a:p>
-          <a:p>
-            <a:endParaRPr lang="ru-RU" dirty="0"/>
-          </a:p>
-          <a:p>
-            <a:r>
-              <a:rPr lang="ru-RU" dirty="0"/>
-              <a:t>Для длинных и сложных функций это не имеет существенного значения. Но для коротких функций накладные расходы на вызов могут быть сопоставимы с временем выполнения самой функции.</a:t>
-            </a:r>
-            <a:endParaRPr lang="en-US" dirty="0"/>
-          </a:p>
-          <a:p>
-            <a:endParaRPr lang="ru-RU" dirty="0"/>
-          </a:p>
-          <a:p>
-            <a:r>
-              <a:rPr lang="ru-RU" dirty="0"/>
-              <a:t>Кроме того, с точки зрения структуры программы возникает некоторая избыточность: ради очень простой логики приходится создавать отдельный </a:t>
-            </a:r>
-            <a:r>
-              <a:rPr lang="ru-RU" sz="1200" kern="1200" dirty="0">
+              <a:t>Рассмотрим небольшой пример модуля.</a:t>
+            </a:r>
+          </a:p>
+          <a:p>
+            <a:r>
+              <a:rPr lang="ru-RU" dirty="0"/>
+              <a:t>В заголовочном файле объявлена функция </a:t>
+            </a:r>
+            <a:r>
+              <a:rPr lang="ru-RU" sz="1200" kern="1200" dirty="0" err="1">
                 <a:solidFill>
                   <a:schemeClr val="tx1"/>
                 </a:solidFill>
@@ -1102,13 +862,153 @@
                 <a:ea typeface="+mn-ea"/>
                 <a:cs typeface="+mn-cs"/>
               </a:rPr>
+              <a:t>Abs</a:t>
+            </a:r>
+            <a:r>
+              <a:rPr lang="ru-RU" dirty="0"/>
+              <a:t>. Это функция, которая входит в интерфейс модуля и предназначена для использования из других файлов.</a:t>
+            </a:r>
+          </a:p>
+          <a:p>
+            <a:r>
+              <a:rPr lang="ru-RU" dirty="0"/>
+              <a:t>В файле </a:t>
+            </a:r>
+            <a:r>
+              <a:rPr lang="ru-RU" sz="1200" kern="1200" dirty="0" err="1">
+                <a:solidFill>
+                  <a:schemeClr val="tx1"/>
+                </a:solidFill>
+                <a:latin typeface="+mn-lt"/>
+                <a:ea typeface="+mn-ea"/>
+                <a:cs typeface="+mn-cs"/>
+              </a:rPr>
+              <a:t>math_utils.c</a:t>
+            </a:r>
+            <a:r>
+              <a:rPr lang="ru-RU" dirty="0"/>
+              <a:t> находится реализация. Здесь, помимо функции </a:t>
+            </a:r>
+            <a:r>
+              <a:rPr lang="ru-RU" sz="1200" kern="1200" dirty="0" err="1">
+                <a:solidFill>
+                  <a:schemeClr val="tx1"/>
+                </a:solidFill>
+                <a:latin typeface="+mn-lt"/>
+                <a:ea typeface="+mn-ea"/>
+                <a:cs typeface="+mn-cs"/>
+              </a:rPr>
+              <a:t>Abs</a:t>
+            </a:r>
+            <a:r>
+              <a:rPr lang="ru-RU" dirty="0"/>
+              <a:t>, определена вспомогательная функция </a:t>
+            </a:r>
+            <a:r>
+              <a:rPr lang="ru-RU" sz="1200" kern="1200" dirty="0" err="1">
+                <a:solidFill>
+                  <a:schemeClr val="tx1"/>
+                </a:solidFill>
+                <a:latin typeface="+mn-lt"/>
+                <a:ea typeface="+mn-ea"/>
+                <a:cs typeface="+mn-cs"/>
+              </a:rPr>
+              <a:t>Sign</a:t>
+            </a:r>
+            <a:r>
+              <a:rPr lang="ru-RU" dirty="0"/>
+              <a:t>.</a:t>
+            </a:r>
+          </a:p>
+          <a:p>
+            <a:endParaRPr lang="ru-RU" dirty="0"/>
+          </a:p>
+          <a:p>
+            <a:r>
+              <a:rPr lang="ru-RU" dirty="0"/>
+              <a:t>Обратите внимание, что функция </a:t>
+            </a:r>
+            <a:r>
+              <a:rPr lang="ru-RU" sz="1200" kern="1200" dirty="0" err="1">
+                <a:solidFill>
+                  <a:schemeClr val="tx1"/>
+                </a:solidFill>
+                <a:latin typeface="+mn-lt"/>
+                <a:ea typeface="+mn-ea"/>
+                <a:cs typeface="+mn-cs"/>
+              </a:rPr>
+              <a:t>Sign</a:t>
+            </a:r>
+            <a:r>
+              <a:rPr lang="ru-RU" dirty="0"/>
+              <a:t> объявлена с ключевым словом </a:t>
+            </a:r>
+            <a:r>
+              <a:rPr lang="ru-RU" sz="1200" kern="1200" dirty="0" err="1">
+                <a:solidFill>
+                  <a:schemeClr val="tx1"/>
+                </a:solidFill>
+                <a:latin typeface="+mn-lt"/>
+                <a:ea typeface="+mn-ea"/>
+                <a:cs typeface="+mn-cs"/>
+              </a:rPr>
+              <a:t>static</a:t>
+            </a:r>
+            <a:r>
+              <a:rPr lang="ru-RU" dirty="0"/>
+              <a:t>. Это означает, что она доступна только внутри текущего </a:t>
+            </a:r>
+            <a:r>
+              <a:rPr lang="ru-RU" sz="1200" kern="1200" dirty="0">
+                <a:solidFill>
+                  <a:schemeClr val="tx1"/>
+                </a:solidFill>
+                <a:latin typeface="+mn-lt"/>
+                <a:ea typeface="+mn-ea"/>
+                <a:cs typeface="+mn-cs"/>
+              </a:rPr>
               <a:t>.c</a:t>
             </a:r>
             <a:r>
               <a:rPr lang="ru-RU" dirty="0"/>
-              <a:t> файл и заголовочный файл.</a:t>
-            </a:r>
-            <a:endParaRPr lang="en-US" dirty="0"/>
+              <a:t> файла и не может быть вызвана из других модулей.</a:t>
+            </a:r>
+          </a:p>
+          <a:p>
+            <a:r>
+              <a:rPr lang="ru-RU" dirty="0"/>
+              <a:t>Такое решение оправдано, поскольку </a:t>
+            </a:r>
+            <a:r>
+              <a:rPr lang="ru-RU" sz="1200" kern="1200" dirty="0" err="1">
+                <a:solidFill>
+                  <a:schemeClr val="tx1"/>
+                </a:solidFill>
+                <a:latin typeface="+mn-lt"/>
+                <a:ea typeface="+mn-ea"/>
+                <a:cs typeface="+mn-cs"/>
+              </a:rPr>
+              <a:t>Sign</a:t>
+            </a:r>
+            <a:r>
+              <a:rPr lang="ru-RU" dirty="0"/>
+              <a:t> является внутренней деталью реализации. Пользователю модуля не нужно знать о её существовании — ему достаточно функции </a:t>
+            </a:r>
+            <a:r>
+              <a:rPr lang="ru-RU" sz="1200" kern="1200" dirty="0" err="1">
+                <a:solidFill>
+                  <a:schemeClr val="tx1"/>
+                </a:solidFill>
+                <a:latin typeface="+mn-lt"/>
+                <a:ea typeface="+mn-ea"/>
+                <a:cs typeface="+mn-cs"/>
+              </a:rPr>
+              <a:t>Abs</a:t>
+            </a:r>
+            <a:r>
+              <a:rPr lang="ru-RU" dirty="0"/>
+              <a:t>.</a:t>
+            </a:r>
           </a:p>
           <a:p>
             <a:endParaRPr lang="ru-RU" dirty="0"/>
@@ -1116,7 +1016,79 @@
           <a:p>
             <a:r>
               <a:rPr lang="ru-RU" dirty="0"/>
-              <a:t>Возникает естественное желание сохранить преимущества модульности, но при этом избежать лишних накладных расходов и упростить код.</a:t>
+              <a:t>Использование </a:t>
+            </a:r>
+            <a:r>
+              <a:rPr lang="ru-RU" sz="1200" kern="1200" dirty="0" err="1">
+                <a:solidFill>
+                  <a:schemeClr val="tx1"/>
+                </a:solidFill>
+                <a:latin typeface="+mn-lt"/>
+                <a:ea typeface="+mn-ea"/>
+                <a:cs typeface="+mn-cs"/>
+              </a:rPr>
+              <a:t>static</a:t>
+            </a:r>
+            <a:r>
+              <a:rPr lang="ru-RU" dirty="0"/>
+              <a:t> позволяет явно разделить интерфейс и внутреннюю реализацию: снаружи видна только одна функция, а вспомогательная логика скрыта внутри модуля.</a:t>
+            </a:r>
+          </a:p>
+          <a:p>
+            <a:r>
+              <a:rPr lang="ru-RU" dirty="0"/>
+              <a:t>Кроме того, у </a:t>
+            </a:r>
+            <a:r>
+              <a:rPr lang="ru-RU" sz="1200" kern="1200" dirty="0" err="1">
+                <a:solidFill>
+                  <a:schemeClr val="tx1"/>
+                </a:solidFill>
+                <a:latin typeface="+mn-lt"/>
+                <a:ea typeface="+mn-ea"/>
+                <a:cs typeface="+mn-cs"/>
+              </a:rPr>
+              <a:t>static</a:t>
+            </a:r>
+            <a:r>
+              <a:rPr lang="ru-RU" dirty="0"/>
+              <a:t> есть ещё одно преимущество. Поскольку компилятор знает, что такая функция используется только внутри одного файла, он может более свободно её оптимизировать.</a:t>
+            </a:r>
+          </a:p>
+          <a:p>
+            <a:r>
+              <a:rPr lang="ru-RU" dirty="0"/>
+              <a:t>Например, он может встроить её код непосредственно в место вызова, изменить способ передачи аргументов или даже полностью убрать вызов функции как отдельную сущность.</a:t>
+            </a:r>
+          </a:p>
+          <a:p>
+            <a:endParaRPr lang="ru-RU" dirty="0"/>
+          </a:p>
+          <a:p>
+            <a:r>
+              <a:rPr lang="ru-RU" dirty="0"/>
+              <a:t>Проще говоря, компилятору не нужно учитывать, что эту функцию могут вызывать из других частей программы, и поэтому он может генерировать более эффективный код.</a:t>
+            </a:r>
+          </a:p>
+          <a:p>
+            <a:r>
+              <a:rPr lang="ru-RU" dirty="0"/>
+              <a:t>Таким образом, </a:t>
+            </a:r>
+            <a:r>
+              <a:rPr lang="ru-RU" sz="1200" kern="1200" dirty="0" err="1">
+                <a:solidFill>
+                  <a:schemeClr val="tx1"/>
+                </a:solidFill>
+                <a:latin typeface="+mn-lt"/>
+                <a:ea typeface="+mn-ea"/>
+                <a:cs typeface="+mn-cs"/>
+              </a:rPr>
+              <a:t>static</a:t>
+            </a:r>
+            <a:r>
+              <a:rPr lang="ru-RU" dirty="0"/>
+              <a:t> одновременно решает две задачи: улучшает структуру программы и даёт компилятору дополнительные возможности для оптимизации.</a:t>
             </a:r>
           </a:p>
           <a:p>
@@ -1141,7 +1113,7 @@
           <a:p>
             <a:fld id="{34FEEA18-11E3-42C4-8C85-DE023A8E1E76}" type="slidenum">
               <a:rPr lang="en-US" smtClean="0"/>
-              <a:t>12</a:t>
+              <a:t>11</a:t>
             </a:fld>
             <a:endParaRPr lang="en-US"/>
           </a:p>
@@ -1150,7 +1122,7 @@
     </p:spTree>
     <p:extLst>
       <p:ext uri="{BB962C8B-B14F-4D97-AF65-F5344CB8AC3E}">
-        <p14:creationId xmlns:p14="http://schemas.microsoft.com/office/powerpoint/2010/main" val="852184028"/>
+        <p14:creationId xmlns:p14="http://schemas.microsoft.com/office/powerpoint/2010/main" val="568413835"/>
       </p:ext>
     </p:extLst>
   </p:cSld>
@@ -1206,19 +1178,43 @@
           <a:p>
             <a:r>
               <a:rPr lang="ru-RU" dirty="0"/>
-              <a:t>Рассмотрим наивное решение: можно попытаться просто написать реализацию функции прямо в заголовочном файле.</a:t>
-            </a:r>
-          </a:p>
-          <a:p>
-            <a:r>
-              <a:rPr lang="ru-RU" dirty="0"/>
-              <a:t>На первый взгляд это выглядит удобно — мы сразу имеем и объявление, и реализацию в одном месте.</a:t>
-            </a:r>
-          </a:p>
-          <a:p>
-            <a:r>
-              <a:rPr lang="ru-RU" dirty="0"/>
-              <a:t>Однако возникает проблема, связанная с тем, как работает директива </a:t>
+              <a:t>Рассмотрим ситуацию с очень короткими функциями.</a:t>
+            </a:r>
+          </a:p>
+          <a:p>
+            <a:r>
+              <a:rPr lang="ru-RU" dirty="0"/>
+              <a:t>Например, функция вычисления модуля числа состоит буквально из одной строки. Однако при её использовании компилятор всё равно генерирует полноценный вызов функции.</a:t>
+            </a:r>
+            <a:endParaRPr lang="en-US" dirty="0"/>
+          </a:p>
+          <a:p>
+            <a:endParaRPr lang="ru-RU" dirty="0"/>
+          </a:p>
+          <a:p>
+            <a:r>
+              <a:rPr lang="ru-RU" dirty="0"/>
+              <a:t>Это означает, что перед выполнением тела функции происходит переход к ней, а затем возврат обратно. Такие операции требуют дополнительных инструкций.</a:t>
+            </a:r>
+            <a:endParaRPr lang="en-US" dirty="0"/>
+          </a:p>
+          <a:p>
+            <a:endParaRPr lang="ru-RU" dirty="0"/>
+          </a:p>
+          <a:p>
+            <a:r>
+              <a:rPr lang="ru-RU" dirty="0"/>
+              <a:t>Для длинных и сложных функций это не имеет существенного значения. Но для коротких функций накладные расходы на вызов могут быть сопоставимы с временем выполнения самой функции.</a:t>
+            </a:r>
+            <a:endParaRPr lang="en-US" dirty="0"/>
+          </a:p>
+          <a:p>
+            <a:endParaRPr lang="ru-RU" dirty="0"/>
+          </a:p>
+          <a:p>
+            <a:r>
+              <a:rPr lang="ru-RU" dirty="0"/>
+              <a:t>Кроме того, с точки зрения структуры программы возникает некоторая избыточность: ради очень простой логики приходится создавать отдельный </a:t>
             </a:r>
             <a:r>
               <a:rPr lang="ru-RU" sz="1200" kern="1200" dirty="0">
@@ -1229,11 +1225,11 @@
                 <a:ea typeface="+mn-ea"/>
                 <a:cs typeface="+mn-cs"/>
               </a:rPr>
-              <a:t>#include</a:t>
-            </a:r>
-            <a:r>
-              <a:rPr lang="ru-RU" dirty="0"/>
-              <a:t>.</a:t>
+              <a:t>.c</a:t>
+            </a:r>
+            <a:r>
+              <a:rPr lang="ru-RU" dirty="0"/>
+              <a:t> файл и заголовочный файл.</a:t>
             </a:r>
             <a:endParaRPr lang="en-US" dirty="0"/>
           </a:p>
@@ -1243,84 +1239,7 @@
           <a:p>
             <a:r>
               <a:rPr lang="ru-RU" dirty="0"/>
-              <a:t>Как мы уже обсуждали, </a:t>
-            </a:r>
-            <a:r>
-              <a:rPr lang="ru-RU" sz="1200" kern="1200" dirty="0">
-                <a:solidFill>
-                  <a:schemeClr val="tx1"/>
-                </a:solidFill>
-                <a:latin typeface="+mn-lt"/>
-                <a:ea typeface="+mn-ea"/>
-                <a:cs typeface="+mn-cs"/>
-              </a:rPr>
-              <a:t>#include</a:t>
-            </a:r>
-            <a:r>
-              <a:rPr lang="ru-RU" dirty="0"/>
-              <a:t> — это текстовая подстановка. Это означает, что содержимое заголовочного файла буквально вставляется в каждый </a:t>
-            </a:r>
-            <a:r>
-              <a:rPr lang="ru-RU" sz="1200" kern="1200" dirty="0">
-                <a:solidFill>
-                  <a:schemeClr val="tx1"/>
-                </a:solidFill>
-                <a:latin typeface="+mn-lt"/>
-                <a:ea typeface="+mn-ea"/>
-                <a:cs typeface="+mn-cs"/>
-              </a:rPr>
-              <a:t>.c</a:t>
-            </a:r>
-            <a:r>
-              <a:rPr lang="ru-RU" dirty="0"/>
-              <a:t> файл, который его подключает.</a:t>
-            </a:r>
-          </a:p>
-          <a:p>
-            <a:r>
-              <a:rPr lang="ru-RU" dirty="0"/>
-              <a:t>В результате одна и та же функция оказывается определённой в нескольких </a:t>
-            </a:r>
-            <a:r>
-              <a:rPr lang="ru-RU" sz="1200" kern="1200" dirty="0">
-                <a:solidFill>
-                  <a:schemeClr val="tx1"/>
-                </a:solidFill>
-                <a:latin typeface="+mn-lt"/>
-                <a:ea typeface="+mn-ea"/>
-                <a:cs typeface="+mn-cs"/>
-              </a:rPr>
-              <a:t>.c</a:t>
-            </a:r>
-            <a:r>
-              <a:rPr lang="ru-RU" dirty="0"/>
-              <a:t> файлах. После компиляции это приводит к тому, что в каждом объектном файле присутствует своя копия этой функции.</a:t>
-            </a:r>
-            <a:endParaRPr lang="en-US" dirty="0"/>
-          </a:p>
-          <a:p>
-            <a:endParaRPr lang="ru-RU" dirty="0"/>
-          </a:p>
-          <a:p>
-            <a:r>
-              <a:rPr lang="ru-RU" dirty="0"/>
-              <a:t>На этапе компоновки линкер обнаруживает несколько реализаций одной и той же функции с одинаковым именем и выдаёт ошибку.</a:t>
-            </a:r>
-          </a:p>
-          <a:p>
-            <a:r>
-              <a:rPr lang="ru-RU" dirty="0"/>
-              <a:t>Таким образом, обычные функции нельзя просто определять в заголовочных файлах, если этот заголовок используется в нескольких модулях.</a:t>
-            </a:r>
-            <a:endParaRPr lang="en-US" dirty="0"/>
-          </a:p>
-          <a:p>
-            <a:endParaRPr lang="ru-RU" dirty="0"/>
-          </a:p>
-          <a:p>
-            <a:r>
-              <a:rPr lang="ru-RU" dirty="0"/>
-              <a:t>Именно эта проблема подводит нас к следующему вопросу: как всё-таки можно размещать реализацию в заголовочном файле, не нарушая правила компоновки.</a:t>
+              <a:t>Возникает естественное желание сохранить преимущества модульности, но при этом избежать лишних накладных расходов и упростить код.</a:t>
             </a:r>
           </a:p>
           <a:p>
@@ -1345,7 +1264,7 @@
           <a:p>
             <a:fld id="{34FEEA18-11E3-42C4-8C85-DE023A8E1E76}" type="slidenum">
               <a:rPr lang="en-US" smtClean="0"/>
-              <a:t>13</a:t>
+              <a:t>12</a:t>
             </a:fld>
             <a:endParaRPr lang="en-US"/>
           </a:p>
@@ -1354,7 +1273,7 @@
     </p:spTree>
     <p:extLst>
       <p:ext uri="{BB962C8B-B14F-4D97-AF65-F5344CB8AC3E}">
-        <p14:creationId xmlns:p14="http://schemas.microsoft.com/office/powerpoint/2010/main" val="3802778816"/>
+        <p14:creationId xmlns:p14="http://schemas.microsoft.com/office/powerpoint/2010/main" val="852184028"/>
       </p:ext>
     </p:extLst>
   </p:cSld>
@@ -1410,21 +1329,19 @@
           <a:p>
             <a:r>
               <a:rPr lang="ru-RU" dirty="0"/>
-              <a:t>Для решения этой проблемы в языке C используются </a:t>
-            </a:r>
-            <a:r>
-              <a:rPr lang="ru-RU" dirty="0" err="1"/>
-              <a:t>inline</a:t>
-            </a:r>
-            <a:r>
-              <a:rPr lang="ru-RU" dirty="0"/>
-              <a:t>-функции.</a:t>
-            </a:r>
-          </a:p>
-          <a:p>
-            <a:r>
-              <a:rPr lang="ru-RU" dirty="0"/>
-              <a:t>Как мы только что увидели, обычную функцию нельзя определять в заголовочном файле, поскольку это приводит к появлению нескольких одинаковых реализаций в разных </a:t>
+              <a:t>Рассмотрим наивное решение: можно попытаться просто написать реализацию функции прямо в заголовочном файле.</a:t>
+            </a:r>
+          </a:p>
+          <a:p>
+            <a:r>
+              <a:rPr lang="ru-RU" dirty="0"/>
+              <a:t>На первый взгляд это выглядит удобно — мы сразу имеем и объявление, и реализацию в одном месте.</a:t>
+            </a:r>
+          </a:p>
+          <a:p>
+            <a:r>
+              <a:rPr lang="ru-RU" dirty="0"/>
+              <a:t>Однако возникает проблема, связанная с тем, как работает директива </a:t>
             </a:r>
             <a:r>
               <a:rPr lang="ru-RU" sz="1200" kern="1200" dirty="0">
@@ -1435,12 +1352,13 @@
                 <a:ea typeface="+mn-ea"/>
                 <a:cs typeface="+mn-cs"/>
               </a:rPr>
-              <a:t>.c</a:t>
-            </a:r>
-            <a:r>
-              <a:rPr lang="ru-RU" dirty="0"/>
-              <a:t> файлах и, как следствие, к ошибке компоновки.</a:t>
-            </a:r>
+              <a:t>#include</a:t>
+            </a:r>
+            <a:r>
+              <a:rPr lang="ru-RU" dirty="0"/>
+              <a:t>.</a:t>
+            </a:r>
+            <a:endParaRPr lang="en-US" dirty="0"/>
           </a:p>
           <a:p>
             <a:endParaRPr lang="ru-RU" dirty="0"/>
@@ -1448,10 +1366,10 @@
           <a:p>
             <a:r>
               <a:rPr lang="ru-RU" dirty="0"/>
-              <a:t>Ключевое слово </a:t>
-            </a:r>
-            <a:r>
-              <a:rPr lang="ru-RU" sz="1200" kern="1200" dirty="0" err="1">
+              <a:t>Как мы уже обсуждали, </a:t>
+            </a:r>
+            <a:r>
+              <a:rPr lang="ru-RU" sz="1200" kern="1200" dirty="0">
                 <a:solidFill>
                   <a:schemeClr val="tx1"/>
                 </a:solidFill>
@@ -1459,11 +1377,11 @@
                 <a:ea typeface="+mn-ea"/>
                 <a:cs typeface="+mn-cs"/>
               </a:rPr>
-              <a:t>inline</a:t>
-            </a:r>
-            <a:r>
-              <a:rPr lang="ru-RU" dirty="0"/>
-              <a:t> меняет это поведение. Оно сообщает компилятору, что допустимо иметь несколько одинаковых реализаций этой функции в разных единицах трансляции, то есть в разных </a:t>
+              <a:t>#include</a:t>
+            </a:r>
+            <a:r>
+              <a:rPr lang="ru-RU" dirty="0"/>
+              <a:t> — это текстовая подстановка. Это означает, что содержимое заголовочного файла буквально вставляется в каждый </a:t>
             </a:r>
             <a:r>
               <a:rPr lang="ru-RU" sz="1200" kern="1200" dirty="0">
@@ -1478,25 +1396,13 @@
             </a:r>
             <a:r>
               <a:rPr lang="ru-RU" dirty="0"/>
-              <a:t> файлах.</a:t>
-            </a:r>
-            <a:endParaRPr lang="en-US" dirty="0"/>
-          </a:p>
-          <a:p>
-            <a:endParaRPr lang="ru-RU" dirty="0"/>
-          </a:p>
-          <a:p>
-            <a:r>
-              <a:rPr lang="ru-RU" dirty="0"/>
-              <a:t>Другими словами, если заголовочный файл с </a:t>
-            </a:r>
-            <a:r>
-              <a:rPr lang="ru-RU" dirty="0" err="1"/>
-              <a:t>inline</a:t>
-            </a:r>
-            <a:r>
-              <a:rPr lang="ru-RU" dirty="0"/>
-              <a:t>-функцией подключён в нескольких </a:t>
+              <a:t> файл, который его подключает.</a:t>
+            </a:r>
+          </a:p>
+          <a:p>
+            <a:r>
+              <a:rPr lang="ru-RU" dirty="0"/>
+              <a:t>В результате одна и та же функция оказывается определённой в нескольких </a:t>
             </a:r>
             <a:r>
               <a:rPr lang="ru-RU" sz="1200" kern="1200" dirty="0">
@@ -1511,8 +1417,9 @@
             </a:r>
             <a:r>
               <a:rPr lang="ru-RU" dirty="0"/>
-              <a:t> файлах, то каждая из этих единиц компиляции будет содержать свою копию функции. Однако на этапе компоновки такие функции считаются эквивалентными, и линкер может выбрать любую из них.</a:t>
-            </a:r>
+              <a:t> файлах. После компиляции это приводит к тому, что в каждом объектном файле присутствует своя копия этой функции.</a:t>
+            </a:r>
+            <a:endParaRPr lang="en-US" dirty="0"/>
           </a:p>
           <a:p>
             <a:endParaRPr lang="ru-RU" dirty="0"/>
@@ -1520,32 +1427,15 @@
           <a:p>
             <a:r>
               <a:rPr lang="ru-RU" dirty="0"/>
-              <a:t>Таким образом, </a:t>
-            </a:r>
-            <a:r>
-              <a:rPr lang="ru-RU" dirty="0" err="1"/>
-              <a:t>inline</a:t>
-            </a:r>
-            <a:r>
-              <a:rPr lang="ru-RU" dirty="0"/>
-              <a:t>-функции можно безопасно определять в заголовочных файлах без возникновения ошибки «</a:t>
-            </a:r>
-            <a:r>
-              <a:rPr lang="ru-RU" dirty="0" err="1"/>
-              <a:t>multiple</a:t>
-            </a:r>
-            <a:r>
-              <a:rPr lang="ru-RU" dirty="0"/>
-              <a:t> </a:t>
-            </a:r>
-            <a:r>
-              <a:rPr lang="ru-RU" dirty="0" err="1"/>
-              <a:t>definition</a:t>
-            </a:r>
-            <a:r>
-              <a:rPr lang="ru-RU" dirty="0"/>
-              <a:t>».</a:t>
-            </a:r>
+              <a:t>На этапе компоновки линкер обнаруживает несколько реализаций одной и той же функции с одинаковым именем и выдаёт ошибку.</a:t>
+            </a:r>
+          </a:p>
+          <a:p>
+            <a:r>
+              <a:rPr lang="ru-RU" dirty="0"/>
+              <a:t>Таким образом, обычные функции нельзя просто определять в заголовочных файлах, если этот заголовок используется в нескольких модулях.</a:t>
+            </a:r>
+            <a:endParaRPr lang="en-US" dirty="0"/>
           </a:p>
           <a:p>
             <a:endParaRPr lang="ru-RU" dirty="0"/>
@@ -1553,48 +1443,7 @@
           <a:p>
             <a:r>
               <a:rPr lang="ru-RU" dirty="0"/>
-              <a:t>Кроме этого, поскольку тело функции находится непосредственно в заголовочном файле, компилятор видит её реализацию в месте вызова. Это даёт ему возможность встроить тело функции прямо в код вызывающей функции и тем самым избежать накладных расходов на вызов.</a:t>
-            </a:r>
-          </a:p>
-          <a:p>
-            <a:endParaRPr lang="ru-RU" dirty="0"/>
-          </a:p>
-          <a:p>
-            <a:r>
-              <a:rPr lang="ru-RU" dirty="0"/>
-              <a:t>Внимание: само ключевое слово </a:t>
-            </a:r>
-            <a:r>
-              <a:rPr lang="ru-RU" sz="1200" kern="1200" dirty="0" err="1">
-                <a:solidFill>
-                  <a:schemeClr val="tx1"/>
-                </a:solidFill>
-                <a:latin typeface="+mn-lt"/>
-                <a:ea typeface="+mn-ea"/>
-                <a:cs typeface="+mn-cs"/>
-              </a:rPr>
-              <a:t>inline</a:t>
-            </a:r>
-            <a:r>
-              <a:rPr lang="ru-RU" dirty="0"/>
-              <a:t> не гарантирует встраивание функции. Оно лишь даёт компилятору дополнительную информацию и разрешает определённую модель использования. Решение о встраивании компилятор принимает самостоятельно.</a:t>
-            </a:r>
-          </a:p>
-          <a:p>
-            <a:endParaRPr lang="ru-RU" dirty="0"/>
-          </a:p>
-          <a:p>
-            <a:r>
-              <a:rPr lang="ru-RU" dirty="0"/>
-              <a:t>Таким образом, </a:t>
-            </a:r>
-            <a:r>
-              <a:rPr lang="ru-RU" dirty="0" err="1"/>
-              <a:t>inline</a:t>
-            </a:r>
-            <a:r>
-              <a:rPr lang="ru-RU" dirty="0"/>
-              <a:t>-функции одновременно решают проблему множественных определений и дают компилятору больше возможностей для оптимизации.</a:t>
+              <a:t>Именно эта проблема подводит нас к следующему вопросу: как всё-таки можно размещать реализацию в заголовочном файле, не нарушая правила компоновки.</a:t>
             </a:r>
           </a:p>
           <a:p>
@@ -1619,7 +1468,7 @@
           <a:p>
             <a:fld id="{34FEEA18-11E3-42C4-8C85-DE023A8E1E76}" type="slidenum">
               <a:rPr lang="en-US" smtClean="0"/>
-              <a:t>14</a:t>
+              <a:t>13</a:t>
             </a:fld>
             <a:endParaRPr lang="en-US"/>
           </a:p>
@@ -1628,7 +1477,7 @@
     </p:spTree>
     <p:extLst>
       <p:ext uri="{BB962C8B-B14F-4D97-AF65-F5344CB8AC3E}">
-        <p14:creationId xmlns:p14="http://schemas.microsoft.com/office/powerpoint/2010/main" val="694931927"/>
+        <p14:creationId xmlns:p14="http://schemas.microsoft.com/office/powerpoint/2010/main" val="3802778816"/>
       </p:ext>
     </p:extLst>
   </p:cSld>
@@ -1684,13 +1533,75 @@
           <a:p>
             <a:r>
               <a:rPr lang="ru-RU" dirty="0"/>
-              <a:t>До этого момента мы объявляли структуры прямо в заголовочных файлах, тем самым делая их полностью доступными пользователю модуля.</a:t>
-            </a:r>
-          </a:p>
-          <a:p>
-            <a:r>
-              <a:rPr lang="ru-RU" dirty="0"/>
-              <a:t>Это означает, что любой код, подключивший заголовочный файл, может напрямую обращаться к полям структуры и изменять их.</a:t>
+              <a:t>Для решения этой проблемы в языке C используются </a:t>
+            </a:r>
+            <a:r>
+              <a:rPr lang="ru-RU" dirty="0" err="1"/>
+              <a:t>inline</a:t>
+            </a:r>
+            <a:r>
+              <a:rPr lang="ru-RU" dirty="0"/>
+              <a:t>-функции.</a:t>
+            </a:r>
+          </a:p>
+          <a:p>
+            <a:r>
+              <a:rPr lang="ru-RU" dirty="0"/>
+              <a:t>Как мы только что увидели, обычную функцию нельзя определять в заголовочном файле, поскольку это приводит к появлению нескольких одинаковых реализаций в разных </a:t>
+            </a:r>
+            <a:r>
+              <a:rPr lang="ru-RU" sz="1200" kern="1200" dirty="0">
+                <a:solidFill>
+                  <a:schemeClr val="tx1"/>
+                </a:solidFill>
+                <a:latin typeface="+mn-lt"/>
+                <a:ea typeface="+mn-ea"/>
+                <a:cs typeface="+mn-cs"/>
+              </a:rPr>
+              <a:t>.c</a:t>
+            </a:r>
+            <a:r>
+              <a:rPr lang="ru-RU" dirty="0"/>
+              <a:t> файлах и, как следствие, к ошибке компоновки.</a:t>
+            </a:r>
+          </a:p>
+          <a:p>
+            <a:endParaRPr lang="ru-RU" dirty="0"/>
+          </a:p>
+          <a:p>
+            <a:r>
+              <a:rPr lang="ru-RU" dirty="0"/>
+              <a:t>Ключевое слово </a:t>
+            </a:r>
+            <a:r>
+              <a:rPr lang="ru-RU" sz="1200" kern="1200" dirty="0" err="1">
+                <a:solidFill>
+                  <a:schemeClr val="tx1"/>
+                </a:solidFill>
+                <a:latin typeface="+mn-lt"/>
+                <a:ea typeface="+mn-ea"/>
+                <a:cs typeface="+mn-cs"/>
+              </a:rPr>
+              <a:t>inline</a:t>
+            </a:r>
+            <a:r>
+              <a:rPr lang="ru-RU" dirty="0"/>
+              <a:t> меняет это поведение. Оно сообщает компилятору, что допустимо иметь несколько одинаковых реализаций этой функции в разных единицах трансляции, то есть в разных </a:t>
+            </a:r>
+            <a:r>
+              <a:rPr lang="ru-RU" sz="1200" kern="1200" dirty="0">
+                <a:solidFill>
+                  <a:schemeClr val="tx1"/>
+                </a:solidFill>
+                <a:latin typeface="+mn-lt"/>
+                <a:ea typeface="+mn-ea"/>
+                <a:cs typeface="+mn-cs"/>
+              </a:rPr>
+              <a:t>.c</a:t>
+            </a:r>
+            <a:r>
+              <a:rPr lang="ru-RU" dirty="0"/>
+              <a:t> файлах.</a:t>
             </a:r>
             <a:endParaRPr lang="en-US" dirty="0"/>
           </a:p>
@@ -1700,9 +1611,31 @@
           <a:p>
             <a:r>
               <a:rPr lang="ru-RU" dirty="0"/>
-              <a:t>Однако такой подход нарушает инкапсуляцию. Пользователь начинает зависеть от внутреннего устройства структуры.</a:t>
-            </a:r>
-            <a:endParaRPr lang="en-US" dirty="0"/>
+              <a:t>Другими словами, если заголовочный файл с </a:t>
+            </a:r>
+            <a:r>
+              <a:rPr lang="ru-RU" dirty="0" err="1"/>
+              <a:t>inline</a:t>
+            </a:r>
+            <a:r>
+              <a:rPr lang="ru-RU" dirty="0"/>
+              <a:t>-функцией подключён в нескольких </a:t>
+            </a:r>
+            <a:r>
+              <a:rPr lang="ru-RU" sz="1200" kern="1200" dirty="0">
+                <a:solidFill>
+                  <a:schemeClr val="tx1"/>
+                </a:solidFill>
+                <a:latin typeface="+mn-lt"/>
+                <a:ea typeface="+mn-ea"/>
+                <a:cs typeface="+mn-cs"/>
+              </a:rPr>
+              <a:t>.c</a:t>
+            </a:r>
+            <a:r>
+              <a:rPr lang="ru-RU" dirty="0"/>
+              <a:t> файлах, то каждая из этих единиц компиляции будет содержать свою копию функции. Однако на этапе компоновки такие функции считаются эквивалентными, и линкер может выбрать любую из них.</a:t>
+            </a:r>
           </a:p>
           <a:p>
             <a:endParaRPr lang="ru-RU" dirty="0"/>
@@ -1710,11 +1643,19 @@
           <a:p>
             <a:r>
               <a:rPr lang="ru-RU" dirty="0"/>
-              <a:t>Альтернативный подход заключается в том, чтобы объявить структуру без её определения. Это называется неполным типом или </a:t>
+              <a:t>Таким образом, </a:t>
             </a:r>
             <a:r>
               <a:rPr lang="ru-RU" dirty="0" err="1"/>
-              <a:t>forward</a:t>
+              <a:t>inline</a:t>
+            </a:r>
+            <a:r>
+              <a:rPr lang="ru-RU" dirty="0"/>
+              <a:t>-функции можно безопасно определять в заголовочных файлах без возникновения ошибки «</a:t>
+            </a:r>
+            <a:r>
+              <a:rPr lang="ru-RU" dirty="0" err="1"/>
+              <a:t>multiple</a:t>
             </a:r>
             <a:r>
               <a:rPr lang="ru-RU" dirty="0"/>
@@ -1722,13 +1663,12 @@
             </a:r>
             <a:r>
               <a:rPr lang="ru-RU" dirty="0" err="1"/>
-              <a:t>declaration</a:t>
-            </a:r>
-            <a:r>
-              <a:rPr lang="ru-RU" dirty="0"/>
-              <a:t>.</a:t>
-            </a:r>
-            <a:endParaRPr lang="en-US" dirty="0"/>
+              <a:t>definition</a:t>
+            </a:r>
+            <a:r>
+              <a:rPr lang="ru-RU" dirty="0"/>
+              <a:t>».</a:t>
+            </a:r>
           </a:p>
           <a:p>
             <a:endParaRPr lang="ru-RU" dirty="0"/>
@@ -1736,9 +1676,8 @@
           <a:p>
             <a:r>
               <a:rPr lang="ru-RU" dirty="0"/>
-              <a:t>В этом случае мы сообщаем компилятору, что структура с таким именем существует, но не раскрываем её содержимое.</a:t>
-            </a:r>
-            <a:endParaRPr lang="en-US" dirty="0"/>
+              <a:t>Кроме этого, поскольку тело функции находится непосредственно в заголовочном файле, компилятор видит её реализацию в месте вызова. Это даёт ему возможность встроить тело функции прямо в код вызывающей функции и тем самым избежать накладных расходов на вызов.</a:t>
+            </a:r>
           </a:p>
           <a:p>
             <a:endParaRPr lang="ru-RU" dirty="0"/>
@@ -1746,7 +1685,39 @@
           <a:p>
             <a:r>
               <a:rPr lang="ru-RU" dirty="0"/>
-              <a:t>Этого уже достаточно, чтобы работать с указателями на эту структуру и объявлять функции, которые принимают или возвращают такие указатели.</a:t>
+              <a:t>Внимание: само ключевое слово </a:t>
+            </a:r>
+            <a:r>
+              <a:rPr lang="ru-RU" sz="1200" kern="1200" dirty="0" err="1">
+                <a:solidFill>
+                  <a:schemeClr val="tx1"/>
+                </a:solidFill>
+                <a:latin typeface="+mn-lt"/>
+                <a:ea typeface="+mn-ea"/>
+                <a:cs typeface="+mn-cs"/>
+              </a:rPr>
+              <a:t>inline</a:t>
+            </a:r>
+            <a:r>
+              <a:rPr lang="ru-RU" dirty="0"/>
+              <a:t> не гарантирует встраивание функции. Оно лишь даёт компилятору дополнительную информацию и разрешает определённую модель использования. Решение о встраивании компилятор принимает самостоятельно.</a:t>
+            </a:r>
+          </a:p>
+          <a:p>
+            <a:endParaRPr lang="ru-RU" dirty="0"/>
+          </a:p>
+          <a:p>
+            <a:r>
+              <a:rPr lang="ru-RU" dirty="0"/>
+              <a:t>Таким образом, </a:t>
+            </a:r>
+            <a:r>
+              <a:rPr lang="ru-RU" dirty="0" err="1"/>
+              <a:t>inline</a:t>
+            </a:r>
+            <a:r>
+              <a:rPr lang="ru-RU" dirty="0"/>
+              <a:t>-функции одновременно решают проблему множественных определений и дают компилятору больше возможностей для оптимизации.</a:t>
             </a:r>
           </a:p>
           <a:p>
@@ -1771,7 +1742,7 @@
           <a:p>
             <a:fld id="{34FEEA18-11E3-42C4-8C85-DE023A8E1E76}" type="slidenum">
               <a:rPr lang="en-US" smtClean="0"/>
-              <a:t>15</a:t>
+              <a:t>14</a:t>
             </a:fld>
             <a:endParaRPr lang="en-US"/>
           </a:p>
@@ -1780,7 +1751,7 @@
     </p:spTree>
     <p:extLst>
       <p:ext uri="{BB962C8B-B14F-4D97-AF65-F5344CB8AC3E}">
-        <p14:creationId xmlns:p14="http://schemas.microsoft.com/office/powerpoint/2010/main" val="1999481219"/>
+        <p14:creationId xmlns:p14="http://schemas.microsoft.com/office/powerpoint/2010/main" val="694931927"/>
       </p:ext>
     </p:extLst>
   </p:cSld>
@@ -1836,52 +1807,72 @@
           <a:p>
             <a:r>
               <a:rPr lang="ru-RU" dirty="0"/>
-              <a:t>Определение структуры переносится в файл реализации.</a:t>
-            </a:r>
-          </a:p>
-          <a:p>
-            <a:r>
-              <a:rPr lang="ru-RU" dirty="0"/>
-              <a:t>В заголовочном файле остаётся только объявление типа и набор функций, которые образуют интерфейс модуля.</a:t>
-            </a:r>
-          </a:p>
-          <a:p>
-            <a:r>
-              <a:rPr lang="ru-RU" dirty="0"/>
-              <a:t>В файле </a:t>
-            </a:r>
-            <a:r>
-              <a:rPr lang="ru-RU" sz="1200" kern="1200" dirty="0">
-                <a:solidFill>
-                  <a:schemeClr val="tx1"/>
-                </a:solidFill>
-                <a:latin typeface="+mn-lt"/>
-                <a:ea typeface="+mn-ea"/>
-                <a:cs typeface="+mn-cs"/>
-              </a:rPr>
-              <a:t>.c</a:t>
-            </a:r>
-            <a:r>
-              <a:rPr lang="ru-RU" dirty="0"/>
-              <a:t> структура уже полностью определяется, и только здесь доступна информация о её полях.</a:t>
-            </a:r>
-          </a:p>
-          <a:p>
-            <a:r>
-              <a:rPr lang="ru-RU" dirty="0"/>
-              <a:t>Это означает, что только код внутри модуля может напрямую работать с полями структуры.</a:t>
-            </a:r>
-          </a:p>
-          <a:p>
-            <a:r>
-              <a:rPr lang="ru-RU" dirty="0"/>
-              <a:t>Внешний код может оперировать только указателями и вызывать функции модуля.</a:t>
-            </a:r>
-          </a:p>
-          <a:p>
-            <a:br>
-              <a:rPr lang="ru-RU" dirty="0"/>
-            </a:br>
+              <a:t>До этого момента мы объявляли структуры прямо в заголовочных файлах, тем самым делая их полностью доступными пользователю модуля.</a:t>
+            </a:r>
+          </a:p>
+          <a:p>
+            <a:r>
+              <a:rPr lang="ru-RU" dirty="0"/>
+              <a:t>Это означает, что любой код, подключивший заголовочный файл, может напрямую обращаться к полям структуры и изменять их.</a:t>
+            </a:r>
+            <a:endParaRPr lang="en-US" dirty="0"/>
+          </a:p>
+          <a:p>
+            <a:endParaRPr lang="ru-RU" dirty="0"/>
+          </a:p>
+          <a:p>
+            <a:r>
+              <a:rPr lang="ru-RU" dirty="0"/>
+              <a:t>Однако такой подход нарушает инкапсуляцию. Пользователь начинает зависеть от внутреннего устройства структуры.</a:t>
+            </a:r>
+            <a:endParaRPr lang="en-US" dirty="0"/>
+          </a:p>
+          <a:p>
+            <a:endParaRPr lang="ru-RU" dirty="0"/>
+          </a:p>
+          <a:p>
+            <a:r>
+              <a:rPr lang="ru-RU" dirty="0"/>
+              <a:t>Альтернативный подход заключается в том, чтобы объявить структуру без её определения. Это называется неполным типом или </a:t>
+            </a:r>
+            <a:r>
+              <a:rPr lang="ru-RU" dirty="0" err="1"/>
+              <a:t>forward</a:t>
+            </a:r>
+            <a:r>
+              <a:rPr lang="ru-RU" dirty="0"/>
+              <a:t> </a:t>
+            </a:r>
+            <a:r>
+              <a:rPr lang="ru-RU" dirty="0" err="1"/>
+              <a:t>declaration</a:t>
+            </a:r>
+            <a:r>
+              <a:rPr lang="ru-RU" dirty="0"/>
+              <a:t>.</a:t>
+            </a:r>
+            <a:endParaRPr lang="en-US" dirty="0"/>
+          </a:p>
+          <a:p>
+            <a:endParaRPr lang="ru-RU" dirty="0"/>
+          </a:p>
+          <a:p>
+            <a:r>
+              <a:rPr lang="ru-RU" dirty="0"/>
+              <a:t>В этом случае мы сообщаем компилятору, что структура с таким именем существует, но не раскрываем её содержимое.</a:t>
+            </a:r>
+            <a:endParaRPr lang="en-US" dirty="0"/>
+          </a:p>
+          <a:p>
+            <a:endParaRPr lang="ru-RU" dirty="0"/>
+          </a:p>
+          <a:p>
+            <a:r>
+              <a:rPr lang="ru-RU" dirty="0"/>
+              <a:t>Этого уже достаточно, чтобы работать с указателями на эту структуру и объявлять функции, которые принимают или возвращают такие указатели.</a:t>
+            </a:r>
+          </a:p>
+          <a:p>
             <a:endParaRPr lang="en-US" dirty="0"/>
           </a:p>
         </p:txBody>
@@ -1903,7 +1894,7 @@
           <a:p>
             <a:fld id="{34FEEA18-11E3-42C4-8C85-DE023A8E1E76}" type="slidenum">
               <a:rPr lang="en-US" smtClean="0"/>
-              <a:t>16</a:t>
+              <a:t>15</a:t>
             </a:fld>
             <a:endParaRPr lang="en-US"/>
           </a:p>
@@ -1912,7 +1903,7 @@
     </p:spTree>
     <p:extLst>
       <p:ext uri="{BB962C8B-B14F-4D97-AF65-F5344CB8AC3E}">
-        <p14:creationId xmlns:p14="http://schemas.microsoft.com/office/powerpoint/2010/main" val="709371744"/>
+        <p14:creationId xmlns:p14="http://schemas.microsoft.com/office/powerpoint/2010/main" val="1999481219"/>
       </p:ext>
     </p:extLst>
   </p:cSld>
@@ -1968,75 +1959,52 @@
           <a:p>
             <a:r>
               <a:rPr lang="ru-RU" dirty="0"/>
-              <a:t>Использование неполных типов приводит к тому, что пользователь модуля не может создавать объекты этой структуры напрямую.</a:t>
-            </a:r>
-            <a:endParaRPr lang="en-US" dirty="0"/>
-          </a:p>
-          <a:p>
-            <a:endParaRPr lang="ru-RU" dirty="0"/>
-          </a:p>
-          <a:p>
-            <a:r>
-              <a:rPr lang="ru-RU" dirty="0"/>
-              <a:t>Попытка объявить переменную такого типа или обратиться к её полям приведёт к ошибке компиляции, поскольку размер структуры неизвестен.</a:t>
-            </a:r>
-          </a:p>
-          <a:p>
-            <a:endParaRPr lang="en-US" dirty="0"/>
-          </a:p>
-          <a:p>
-            <a:r>
-              <a:rPr lang="ru-RU" dirty="0"/>
-              <a:t>Однако пользователь может работать с указателями на эту структуру и вызывать функции модуля.</a:t>
-            </a:r>
-            <a:endParaRPr lang="en-US" dirty="0"/>
-          </a:p>
-          <a:p>
-            <a:endParaRPr lang="ru-RU" dirty="0"/>
-          </a:p>
-          <a:p>
-            <a:r>
-              <a:rPr lang="ru-RU" dirty="0"/>
-              <a:t>Обычно такие функции создают объект в динамической памяти, возвращают указатель, позволяют выполнять операции над объектом и затем освобождают память.</a:t>
-            </a:r>
-            <a:endParaRPr lang="en-US" dirty="0"/>
-          </a:p>
-          <a:p>
-            <a:endParaRPr lang="ru-RU" dirty="0"/>
-          </a:p>
-          <a:p>
-            <a:r>
-              <a:rPr lang="ru-RU" dirty="0"/>
-              <a:t>Такой подход обеспечивает инкапсуляцию: внутренняя реализация полностью скрыта от пользователя.</a:t>
-            </a:r>
-          </a:p>
-          <a:p>
-            <a:r>
-              <a:rPr lang="ru-RU" dirty="0"/>
-              <a:t>Это даёт важные преимущества. Мы можем изменять структуру, добавлять или удалять поля, не опасаясь, что внешний код зависит от её внутреннего устройства.</a:t>
-            </a:r>
-            <a:endParaRPr lang="en-US" dirty="0"/>
-          </a:p>
-          <a:p>
-            <a:endParaRPr lang="ru-RU" dirty="0"/>
-          </a:p>
-          <a:p>
-            <a:r>
-              <a:rPr lang="ru-RU" dirty="0"/>
-              <a:t>Кроме того, мы можем контролировать все операции над данными и гарантировать корректность их использования.</a:t>
-            </a:r>
-            <a:endParaRPr lang="en-US" dirty="0"/>
-          </a:p>
-          <a:p>
-            <a:endParaRPr lang="ru-RU" dirty="0"/>
-          </a:p>
-          <a:p>
-            <a:r>
-              <a:rPr lang="ru-RU" dirty="0"/>
-              <a:t>Именно такой подход широко применяется в реальных библиотеках на языке C.</a:t>
-            </a:r>
-          </a:p>
-          <a:p>
+              <a:t>Определение структуры переносится в файл реализации.</a:t>
+            </a:r>
+          </a:p>
+          <a:p>
+            <a:r>
+              <a:rPr lang="ru-RU" dirty="0"/>
+              <a:t>В заголовочном файле остаётся только объявление типа и набор функций, которые образуют интерфейс модуля.</a:t>
+            </a:r>
+          </a:p>
+          <a:p>
+            <a:r>
+              <a:rPr lang="ru-RU" dirty="0"/>
+              <a:t>В файле </a:t>
+            </a:r>
+            <a:r>
+              <a:rPr lang="ru-RU" sz="1200" kern="1200" dirty="0">
+                <a:solidFill>
+                  <a:schemeClr val="tx1"/>
+                </a:solidFill>
+                <a:latin typeface="+mn-lt"/>
+                <a:ea typeface="+mn-ea"/>
+                <a:cs typeface="+mn-cs"/>
+              </a:rPr>
+              <a:t>.c</a:t>
+            </a:r>
+            <a:r>
+              <a:rPr lang="ru-RU" dirty="0"/>
+              <a:t> структура уже полностью определяется, и только здесь доступна информация о её полях.</a:t>
+            </a:r>
+          </a:p>
+          <a:p>
+            <a:r>
+              <a:rPr lang="ru-RU" dirty="0"/>
+              <a:t>Это означает, что только код внутри модуля может напрямую работать с полями структуры.</a:t>
+            </a:r>
+          </a:p>
+          <a:p>
+            <a:r>
+              <a:rPr lang="ru-RU" dirty="0"/>
+              <a:t>Внешний код может оперировать только указателями и вызывать функции модуля.</a:t>
+            </a:r>
+          </a:p>
+          <a:p>
+            <a:br>
+              <a:rPr lang="ru-RU" dirty="0"/>
+            </a:br>
             <a:endParaRPr lang="en-US" dirty="0"/>
           </a:p>
         </p:txBody>
@@ -2058,6 +2026,161 @@
           <a:p>
             <a:fld id="{34FEEA18-11E3-42C4-8C85-DE023A8E1E76}" type="slidenum">
               <a:rPr lang="en-US" smtClean="0"/>
+              <a:t>16</a:t>
+            </a:fld>
+            <a:endParaRPr lang="en-US"/>
+          </a:p>
+        </p:txBody>
+      </p:sp>
+    </p:spTree>
+    <p:extLst>
+      <p:ext uri="{BB962C8B-B14F-4D97-AF65-F5344CB8AC3E}">
+        <p14:creationId xmlns:p14="http://schemas.microsoft.com/office/powerpoint/2010/main" val="709371744"/>
+      </p:ext>
+    </p:extLst>
+  </p:cSld>
+  <p:clrMapOvr>
+    <a:masterClrMapping/>
+  </p:clrMapOvr>
+</p:notes>
+</file>
+
+<file path=ppt/notesSlides/notesSlide17.xml><?xml version="1.0" encoding="utf-8"?>
+<p:notes xmlns:a="http://schemas.openxmlformats.org/drawingml/2006/main" xmlns:r="http://schemas.openxmlformats.org/officeDocument/2006/relationships" xmlns:p="http://schemas.openxmlformats.org/presentationml/2006/main">
+  <p:cSld>
+    <p:spTree>
+      <p:nvGrpSpPr>
+        <p:cNvPr id="1" name=""/>
+        <p:cNvGrpSpPr/>
+        <p:nvPr/>
+      </p:nvGrpSpPr>
+      <p:grpSpPr>
+        <a:xfrm>
+          <a:off x="0" y="0"/>
+          <a:ext cx="0" cy="0"/>
+          <a:chOff x="0" y="0"/>
+          <a:chExt cx="0" cy="0"/>
+        </a:xfrm>
+      </p:grpSpPr>
+      <p:sp>
+        <p:nvSpPr>
+          <p:cNvPr id="2" name="Slide Image Placeholder 1"/>
+          <p:cNvSpPr>
+            <a:spLocks noGrp="1" noRot="1" noChangeAspect="1"/>
+          </p:cNvSpPr>
+          <p:nvPr>
+            <p:ph type="sldImg"/>
+          </p:nvPr>
+        </p:nvSpPr>
+        <p:spPr/>
+      </p:sp>
+      <p:sp>
+        <p:nvSpPr>
+          <p:cNvPr id="3" name="Notes Placeholder 2"/>
+          <p:cNvSpPr>
+            <a:spLocks noGrp="1"/>
+          </p:cNvSpPr>
+          <p:nvPr>
+            <p:ph type="body" idx="1"/>
+          </p:nvPr>
+        </p:nvSpPr>
+        <p:spPr/>
+        <p:txBody>
+          <a:bodyPr/>
+          <a:lstStyle/>
+          <a:p>
+            <a:r>
+              <a:rPr lang="ru-RU" dirty="0"/>
+              <a:t>Использование неполных типов приводит к тому, что пользователь модуля не может создавать объекты этой структуры напрямую.</a:t>
+            </a:r>
+            <a:endParaRPr lang="en-US" dirty="0"/>
+          </a:p>
+          <a:p>
+            <a:endParaRPr lang="ru-RU" dirty="0"/>
+          </a:p>
+          <a:p>
+            <a:r>
+              <a:rPr lang="ru-RU" dirty="0"/>
+              <a:t>Попытка объявить переменную такого типа или обратиться к её полям приведёт к ошибке компиляции, поскольку размер структуры неизвестен.</a:t>
+            </a:r>
+          </a:p>
+          <a:p>
+            <a:endParaRPr lang="en-US" dirty="0"/>
+          </a:p>
+          <a:p>
+            <a:r>
+              <a:rPr lang="ru-RU" dirty="0"/>
+              <a:t>Однако пользователь может работать с указателями на эту структуру и вызывать функции модуля.</a:t>
+            </a:r>
+            <a:endParaRPr lang="en-US" dirty="0"/>
+          </a:p>
+          <a:p>
+            <a:endParaRPr lang="ru-RU" dirty="0"/>
+          </a:p>
+          <a:p>
+            <a:r>
+              <a:rPr lang="ru-RU" dirty="0"/>
+              <a:t>Обычно такие функции создают объект в динамической памяти, возвращают указатель, позволяют выполнять операции над объектом и затем освобождают память.</a:t>
+            </a:r>
+            <a:endParaRPr lang="en-US" dirty="0"/>
+          </a:p>
+          <a:p>
+            <a:endParaRPr lang="ru-RU" dirty="0"/>
+          </a:p>
+          <a:p>
+            <a:r>
+              <a:rPr lang="ru-RU" dirty="0"/>
+              <a:t>Такой подход обеспечивает инкапсуляцию: внутренняя реализация полностью скрыта от пользователя.</a:t>
+            </a:r>
+          </a:p>
+          <a:p>
+            <a:r>
+              <a:rPr lang="ru-RU" dirty="0"/>
+              <a:t>Это даёт важные преимущества. Мы можем изменять структуру, добавлять или удалять поля, не опасаясь, что внешний код зависит от её внутреннего устройства.</a:t>
+            </a:r>
+            <a:endParaRPr lang="en-US" dirty="0"/>
+          </a:p>
+          <a:p>
+            <a:endParaRPr lang="ru-RU" dirty="0"/>
+          </a:p>
+          <a:p>
+            <a:r>
+              <a:rPr lang="ru-RU" dirty="0"/>
+              <a:t>Кроме того, мы можем контролировать все операции над данными и гарантировать корректность их использования.</a:t>
+            </a:r>
+            <a:endParaRPr lang="en-US" dirty="0"/>
+          </a:p>
+          <a:p>
+            <a:endParaRPr lang="ru-RU" dirty="0"/>
+          </a:p>
+          <a:p>
+            <a:r>
+              <a:rPr lang="ru-RU" dirty="0"/>
+              <a:t>Именно такой подход широко применяется в реальных библиотеках на языке C.</a:t>
+            </a:r>
+          </a:p>
+          <a:p>
+            <a:endParaRPr lang="en-US" dirty="0"/>
+          </a:p>
+        </p:txBody>
+      </p:sp>
+      <p:sp>
+        <p:nvSpPr>
+          <p:cNvPr id="4" name="Slide Number Placeholder 3"/>
+          <p:cNvSpPr>
+            <a:spLocks noGrp="1"/>
+          </p:cNvSpPr>
+          <p:nvPr>
+            <p:ph type="sldNum" sz="quarter" idx="5"/>
+          </p:nvPr>
+        </p:nvSpPr>
+        <p:spPr/>
+        <p:txBody>
+          <a:bodyPr/>
+          <a:lstStyle/>
+          <a:p>
+            <a:fld id="{34FEEA18-11E3-42C4-8C85-DE023A8E1E76}" type="slidenum">
+              <a:rPr lang="en-US" smtClean="0"/>
               <a:t>17</a:t>
             </a:fld>
             <a:endParaRPr lang="en-US"/>
@@ -2077,7 +2200,7 @@
 </p:notes>
 </file>
 
-<file path=ppt/notesSlides/notesSlide17.xml><?xml version="1.0" encoding="utf-8"?>
+<file path=ppt/notesSlides/notesSlide18.xml><?xml version="1.0" encoding="utf-8"?>
 <p:notes xmlns:a="http://schemas.openxmlformats.org/drawingml/2006/main" xmlns:r="http://schemas.openxmlformats.org/officeDocument/2006/relationships" xmlns:p="http://schemas.openxmlformats.org/presentationml/2006/main">
   <p:cSld>
     <p:spTree>
@@ -2269,7 +2392,13 @@
           <a:p>
             <a:r>
               <a:rPr lang="ru-RU" dirty="0"/>
-              <a:t>Рассмотрим ещё одну важную проблему — повторное использование кода.</a:t>
+              <a:t>Рассмотрим ситуацию, когда вся программа реализована в одном исходном файле.</a:t>
+            </a:r>
+          </a:p>
+          <a:p>
+            <a:r>
+              <a:rPr lang="ru-RU" dirty="0"/>
+              <a:t>На начальном этапе разработки это не вызывает проблем: программа компактна, структура очевидна, все функции находятся в одном месте. Однако по мере роста функциональности объём кода существенно увеличивается.</a:t>
             </a:r>
             <a:endParaRPr lang="en-US" dirty="0"/>
           </a:p>
@@ -2279,16 +2408,44 @@
           <a:p>
             <a:r>
               <a:rPr lang="ru-RU" dirty="0"/>
-              <a:t>Предположим, что в одной программе реализована полезная функция, например, для вывода содержимого памяти. Возникает естественное желание использовать эту же функциональность в других программах.</a:t>
-            </a:r>
-          </a:p>
-          <a:p>
+              <a:t>В одном файле начинают сосредотачиваться:</a:t>
+            </a:r>
+          </a:p>
+          <a:p>
+            <a:r>
+              <a:rPr lang="ru-RU" dirty="0"/>
+              <a:t>— функции ввода-вывода</a:t>
+            </a:r>
+            <a:br>
+              <a:rPr lang="ru-RU" dirty="0"/>
+            </a:br>
+            <a:r>
+              <a:rPr lang="ru-RU" dirty="0"/>
+              <a:t>— функции обработки данных</a:t>
+            </a:r>
+            <a:br>
+              <a:rPr lang="ru-RU" dirty="0"/>
+            </a:br>
+            <a:r>
+              <a:rPr lang="ru-RU" dirty="0"/>
+              <a:t>— вспомогательные алгоритмы</a:t>
+            </a:r>
+            <a:br>
+              <a:rPr lang="ru-RU" dirty="0"/>
+            </a:br>
+            <a:r>
+              <a:rPr lang="ru-RU" dirty="0"/>
+              <a:t>— основная логика программы</a:t>
+            </a:r>
             <a:endParaRPr lang="en-US" dirty="0"/>
           </a:p>
           <a:p>
-            <a:r>
-              <a:rPr lang="ru-RU" dirty="0"/>
-              <a:t>Наиболее очевидный способ — скопировать соответствующий код в новый файл. Однако такой подход приводит к дублированию.</a:t>
+            <a:endParaRPr lang="ru-RU" dirty="0"/>
+          </a:p>
+          <a:p>
+            <a:r>
+              <a:rPr lang="ru-RU" dirty="0"/>
+              <a:t>Это приводит к ряду системных проблем.</a:t>
             </a:r>
             <a:endParaRPr lang="en-US" dirty="0"/>
           </a:p>
@@ -2298,7 +2455,7 @@
           <a:p>
             <a:r>
               <a:rPr lang="ru-RU" dirty="0"/>
-              <a:t>Дублирование кода имеет несколько негативных последствий.</a:t>
+              <a:t>Во-первых, снижается читаемость кода. Поиск нужной функции или участка программы становится трудоёмким.</a:t>
             </a:r>
           </a:p>
           <a:p>
@@ -2307,7 +2464,7 @@
           <a:p>
             <a:r>
               <a:rPr lang="ru-RU" dirty="0"/>
-              <a:t>Во-первых, увеличивается объём поддерживаемого кода. Одна и та же логика присутствует в нескольких местах.</a:t>
+              <a:t>Во-вторых, возрастает вероятность ошибок. Изменение одной части программы может неявно повлиять на другую, поскольку отсутствует чёткое разделение ответственности.</a:t>
             </a:r>
           </a:p>
           <a:p>
@@ -2316,39 +2473,23 @@
           <a:p>
             <a:r>
               <a:rPr lang="ru-RU" dirty="0"/>
-              <a:t>Во-вторых, усложняется сопровождение. При обнаружении ошибки необходимо внести исправления во все копии. Это требует дополнительных усилий и легко приводит к несогласованности версий.</a:t>
-            </a:r>
-          </a:p>
-          <a:p>
+              <a:t>В-третьих, затрудняется коллективная разработка. При работе нескольких разработчиков с одним файлом неизбежно возникают конфликты изменений.</a:t>
+            </a:r>
             <a:endParaRPr lang="en-US" dirty="0"/>
           </a:p>
           <a:p>
-            <a:r>
-              <a:rPr lang="ru-RU" dirty="0"/>
-              <a:t>В-третьих, снижается надёжность программного обеспечения, поскольку разные копии одного и того же кода могут вести себя по-разному.</a:t>
-            </a:r>
-            <a:endParaRPr lang="en-US" dirty="0"/>
-          </a:p>
-          <a:p>
             <a:endParaRPr lang="ru-RU" dirty="0"/>
           </a:p>
           <a:p>
             <a:r>
               <a:rPr lang="ru-RU" dirty="0"/>
-              <a:t>Следовательно, простое копирование кода не является масштабируемым решением.</a:t>
-            </a:r>
-            <a:endParaRPr lang="en-US" dirty="0"/>
-          </a:p>
-          <a:p>
-            <a:endParaRPr lang="ru-RU" dirty="0"/>
-          </a:p>
-          <a:p>
-            <a:r>
-              <a:rPr lang="ru-RU" dirty="0"/>
-              <a:t>Необходим механизм, позволяющий выделять функциональность в отдельные компоненты и использовать её повторно без дублирования.</a:t>
-            </a:r>
-          </a:p>
-          <a:p>
+              <a:t>Таким образом, по мере роста программы использование одного файла становится архитектурным ограничением.</a:t>
+            </a:r>
+          </a:p>
+          <a:p>
+            <a:br>
+              <a:rPr lang="ru-RU" dirty="0"/>
+            </a:br>
             <a:endParaRPr lang="en-US" dirty="0"/>
           </a:p>
         </p:txBody>
@@ -2370,7 +2511,7 @@
           <a:p>
             <a:fld id="{34FEEA18-11E3-42C4-8C85-DE023A8E1E76}" type="slidenum">
               <a:rPr lang="en-US" smtClean="0"/>
-              <a:t>3</a:t>
+              <a:t>2</a:t>
             </a:fld>
             <a:endParaRPr lang="en-US"/>
           </a:p>
@@ -2379,7 +2520,7 @@
     </p:spTree>
     <p:extLst>
       <p:ext uri="{BB962C8B-B14F-4D97-AF65-F5344CB8AC3E}">
-        <p14:creationId xmlns:p14="http://schemas.microsoft.com/office/powerpoint/2010/main" val="2725383813"/>
+        <p14:creationId xmlns:p14="http://schemas.microsoft.com/office/powerpoint/2010/main" val="681793956"/>
       </p:ext>
     </p:extLst>
   </p:cSld>
@@ -2435,7 +2576,7 @@
           <a:p>
             <a:r>
               <a:rPr lang="ru-RU" dirty="0"/>
-              <a:t>Решение описанных проблем в языке C состоит в разбиении программы на модули.</a:t>
+              <a:t>Рассмотрим ещё одну важную проблему — повторное использование кода.</a:t>
             </a:r>
             <a:endParaRPr lang="en-US" dirty="0"/>
           </a:p>
@@ -2445,8 +2586,18 @@
           <a:p>
             <a:r>
               <a:rPr lang="ru-RU" dirty="0"/>
-              <a:t>Модуль представляет собой логически завершённую часть программы, которая отвечает за некоторую отдельную задачу. Например, один модуль может содержать функции работы с файлами, другой — функции обработки данных, третий — функции вывода диагностической информации.</a:t>
-            </a:r>
+              <a:t>Предположим, что в одной программе реализована полезная функция, например, для вывода содержимого памяти. Возникает естественное желание использовать эту же функциональность в других программах.</a:t>
+            </a:r>
+          </a:p>
+          <a:p>
+            <a:endParaRPr lang="en-US" dirty="0"/>
+          </a:p>
+          <a:p>
+            <a:r>
+              <a:rPr lang="ru-RU" dirty="0"/>
+              <a:t>Наиболее очевидный способ — скопировать соответствующий код в новый файл. Однако такой подход приводит к дублированию.</a:t>
+            </a:r>
+            <a:endParaRPr lang="en-US" dirty="0"/>
           </a:p>
           <a:p>
             <a:endParaRPr lang="ru-RU" dirty="0"/>
@@ -2454,50 +2605,36 @@
           <a:p>
             <a:r>
               <a:rPr lang="ru-RU" dirty="0"/>
-              <a:t>В языке C модуль обычно оформляется в виде двух файлов.</a:t>
-            </a:r>
-          </a:p>
-          <a:p>
-            <a:r>
-              <a:rPr lang="ru-RU" dirty="0"/>
-              <a:t>Первый файл, с расширением </a:t>
-            </a:r>
-            <a:r>
-              <a:rPr lang="ru-RU" sz="1200" kern="1200" dirty="0">
-                <a:solidFill>
-                  <a:schemeClr val="tx1"/>
-                </a:solidFill>
-                <a:latin typeface="+mn-lt"/>
-                <a:ea typeface="+mn-ea"/>
-                <a:cs typeface="+mn-cs"/>
-              </a:rPr>
-              <a:t>.c</a:t>
-            </a:r>
-            <a:r>
-              <a:rPr lang="ru-RU" dirty="0"/>
-              <a:t>, содержит реализацию, то есть непосредственный программный код функций.</a:t>
-            </a:r>
-          </a:p>
-          <a:p>
-            <a:r>
-              <a:rPr lang="ru-RU" dirty="0"/>
-              <a:t>Второй файл, с расширением </a:t>
-            </a:r>
-            <a:r>
-              <a:rPr lang="ru-RU" sz="1200" kern="1200" dirty="0">
-                <a:solidFill>
-                  <a:schemeClr val="tx1"/>
-                </a:solidFill>
-                <a:latin typeface="+mn-lt"/>
-                <a:ea typeface="+mn-ea"/>
-                <a:cs typeface="+mn-cs"/>
-              </a:rPr>
-              <a:t>.h</a:t>
-            </a:r>
-            <a:r>
-              <a:rPr lang="ru-RU" dirty="0"/>
-              <a:t>, содержит интерфейс модуля: объявления функций, типов данных, констант и других сущностей, которые должны быть доступны из других частей программы.</a:t>
-            </a:r>
+              <a:t>Дублирование кода имеет несколько негативных последствий.</a:t>
+            </a:r>
+          </a:p>
+          <a:p>
+            <a:endParaRPr lang="en-US" dirty="0"/>
+          </a:p>
+          <a:p>
+            <a:r>
+              <a:rPr lang="ru-RU" dirty="0"/>
+              <a:t>Во-первых, увеличивается объём поддерживаемого кода. Одна и та же логика присутствует в нескольких местах.</a:t>
+            </a:r>
+          </a:p>
+          <a:p>
+            <a:endParaRPr lang="en-US" dirty="0"/>
+          </a:p>
+          <a:p>
+            <a:r>
+              <a:rPr lang="ru-RU" dirty="0"/>
+              <a:t>Во-вторых, усложняется сопровождение. При обнаружении ошибки необходимо внести исправления во все копии. Это требует дополнительных усилий и легко приводит к несогласованности версий.</a:t>
+            </a:r>
+          </a:p>
+          <a:p>
+            <a:endParaRPr lang="en-US" dirty="0"/>
+          </a:p>
+          <a:p>
+            <a:r>
+              <a:rPr lang="ru-RU" dirty="0"/>
+              <a:t>В-третьих, снижается надёжность программного обеспечения, поскольку разные копии одного и того же кода могут вести себя по-разному.</a:t>
+            </a:r>
+            <a:endParaRPr lang="en-US" dirty="0"/>
           </a:p>
           <a:p>
             <a:endParaRPr lang="ru-RU" dirty="0"/>
@@ -2505,50 +2642,17 @@
           <a:p>
             <a:r>
               <a:rPr lang="ru-RU" dirty="0"/>
-              <a:t>Такое разделение даёт несколько важных преимуществ.</a:t>
-            </a:r>
-          </a:p>
-          <a:p>
-            <a:pPr marL="171450" indent="-171450">
-              <a:buFont typeface="Arial" panose="020B0604020202020204" pitchFamily="34" charset="0"/>
-              <a:buChar char="•"/>
-            </a:pPr>
-            <a:r>
-              <a:rPr lang="ru-RU" dirty="0"/>
-              <a:t>Во-первых, код становится более структурированным: разные части программы физически разделены по файлам в соответствии со своей ролью.</a:t>
-            </a:r>
-          </a:p>
-          <a:p>
-            <a:pPr marL="171450" indent="-171450">
-              <a:buFont typeface="Arial" panose="020B0604020202020204" pitchFamily="34" charset="0"/>
-              <a:buChar char="•"/>
-            </a:pPr>
-            <a:r>
-              <a:rPr lang="ru-RU" dirty="0"/>
-              <a:t>Во-вторых, модуль можно повторно использовать в нескольких программах без копирования реализации.</a:t>
-            </a:r>
-          </a:p>
-          <a:p>
-            <a:pPr marL="171450" indent="-171450">
-              <a:buFont typeface="Arial" panose="020B0604020202020204" pitchFamily="34" charset="0"/>
-              <a:buChar char="•"/>
-            </a:pPr>
-            <a:r>
-              <a:rPr lang="ru-RU" dirty="0"/>
-              <a:t>В-третьих, изменение внутреннего устройства модуля не требует изменений в других файлах, если его интерфейс остаётся прежним.</a:t>
-            </a:r>
-          </a:p>
-          <a:p>
-            <a:pPr marL="171450" indent="-171450">
-              <a:buFont typeface="Arial" panose="020B0604020202020204" pitchFamily="34" charset="0"/>
-              <a:buChar char="•"/>
-            </a:pPr>
+              <a:t>Следовательно, простое копирование кода не является масштабируемым решением.</a:t>
+            </a:r>
+            <a:endParaRPr lang="en-US" dirty="0"/>
+          </a:p>
+          <a:p>
             <a:endParaRPr lang="ru-RU" dirty="0"/>
           </a:p>
           <a:p>
             <a:r>
               <a:rPr lang="ru-RU" dirty="0"/>
-              <a:t>Именно поэтому модульная организация является стандартным способом построения крупных программ на языке C.</a:t>
+              <a:t>Необходим механизм, позволяющий выделять функциональность в отдельные компоненты и использовать её повторно без дублирования.</a:t>
             </a:r>
           </a:p>
           <a:p>
@@ -2573,7 +2677,7 @@
           <a:p>
             <a:fld id="{34FEEA18-11E3-42C4-8C85-DE023A8E1E76}" type="slidenum">
               <a:rPr lang="en-US" smtClean="0"/>
-              <a:t>4</a:t>
+              <a:t>3</a:t>
             </a:fld>
             <a:endParaRPr lang="en-US"/>
           </a:p>
@@ -2582,7 +2686,7 @@
     </p:spTree>
     <p:extLst>
       <p:ext uri="{BB962C8B-B14F-4D97-AF65-F5344CB8AC3E}">
-        <p14:creationId xmlns:p14="http://schemas.microsoft.com/office/powerpoint/2010/main" val="4005276613"/>
+        <p14:creationId xmlns:p14="http://schemas.microsoft.com/office/powerpoint/2010/main" val="2725383813"/>
       </p:ext>
     </p:extLst>
   </p:cSld>
@@ -2638,16 +2742,35 @@
           <a:p>
             <a:r>
               <a:rPr lang="ru-RU" dirty="0"/>
-              <a:t>Рассмотрим пример структуры модуля на языке C.</a:t>
-            </a:r>
-          </a:p>
-          <a:p>
-            <a:r>
-              <a:rPr lang="ru-RU" dirty="0"/>
-              <a:t>Модуль представлен двумя файлами: </a:t>
-            </a:r>
-            <a:r>
-              <a:rPr lang="ru-RU" sz="1200" kern="1200" dirty="0" err="1">
+              <a:t>Решение описанных проблем в языке C состоит в разбиении программы на модули.</a:t>
+            </a:r>
+            <a:endParaRPr lang="en-US" dirty="0"/>
+          </a:p>
+          <a:p>
+            <a:endParaRPr lang="ru-RU" dirty="0"/>
+          </a:p>
+          <a:p>
+            <a:r>
+              <a:rPr lang="ru-RU" dirty="0"/>
+              <a:t>Модуль представляет собой логически завершённую часть программы, которая отвечает за некоторую отдельную задачу. Например, один модуль может содержать функции работы с файлами, другой — функции обработки данных, третий — функции вывода диагностической информации.</a:t>
+            </a:r>
+          </a:p>
+          <a:p>
+            <a:endParaRPr lang="ru-RU" dirty="0"/>
+          </a:p>
+          <a:p>
+            <a:r>
+              <a:rPr lang="ru-RU" dirty="0"/>
+              <a:t>В языке C модуль обычно оформляется в виде двух файлов.</a:t>
+            </a:r>
+          </a:p>
+          <a:p>
+            <a:r>
+              <a:rPr lang="ru-RU" dirty="0"/>
+              <a:t>Первый файл, с расширением </a:t>
+            </a:r>
+            <a:r>
+              <a:rPr lang="ru-RU" sz="1200" kern="1200" dirty="0">
                 <a:solidFill>
                   <a:schemeClr val="tx1"/>
                 </a:solidFill>
@@ -2655,14 +2778,20 @@
                 <a:ea typeface="+mn-ea"/>
                 <a:cs typeface="+mn-cs"/>
               </a:rPr>
-              <a:t>point.h</a:t>
-            </a:r>
-            <a:r>
-              <a:rPr lang="ru-RU" dirty="0"/>
-              <a:t> и </a:t>
-            </a:r>
-            <a:r>
-              <a:rPr lang="ru-RU" sz="1200" kern="1200" dirty="0" err="1">
+              <a:t>.c</a:t>
+            </a:r>
+            <a:r>
+              <a:rPr lang="ru-RU" dirty="0"/>
+              <a:t>, содержит реализацию, то есть непосредственный программный код функций.</a:t>
+            </a:r>
+          </a:p>
+          <a:p>
+            <a:r>
+              <a:rPr lang="ru-RU" dirty="0"/>
+              <a:t>Второй файл, с расширением </a:t>
+            </a:r>
+            <a:r>
+              <a:rPr lang="ru-RU" sz="1200" kern="1200" dirty="0">
                 <a:solidFill>
                   <a:schemeClr val="tx1"/>
                 </a:solidFill>
@@ -2670,11 +2799,11 @@
                 <a:ea typeface="+mn-ea"/>
                 <a:cs typeface="+mn-cs"/>
               </a:rPr>
-              <a:t>point.c</a:t>
-            </a:r>
-            <a:r>
-              <a:rPr lang="ru-RU" dirty="0"/>
-              <a:t>.</a:t>
+              <a:t>.h</a:t>
+            </a:r>
+            <a:r>
+              <a:rPr lang="ru-RU" dirty="0"/>
+              <a:t>, содержит интерфейс модуля: объявления функций, типов данных, констант и других сущностей, которые должны быть доступны из других частей программы.</a:t>
             </a:r>
           </a:p>
           <a:p>
@@ -2683,344 +2812,50 @@
           <a:p>
             <a:r>
               <a:rPr lang="ru-RU" dirty="0"/>
-              <a:t>Заголовочный файл </a:t>
-            </a:r>
-            <a:r>
-              <a:rPr lang="ru-RU" sz="1200" kern="1200" dirty="0" err="1">
-                <a:solidFill>
-                  <a:schemeClr val="tx1"/>
-                </a:solidFill>
-                <a:latin typeface="+mn-lt"/>
-                <a:ea typeface="+mn-ea"/>
-                <a:cs typeface="+mn-cs"/>
-              </a:rPr>
-              <a:t>point.h</a:t>
-            </a:r>
-            <a:r>
-              <a:rPr lang="ru-RU" dirty="0"/>
-              <a:t> определяет интерфейс модуля. В нём объявляется структура </a:t>
-            </a:r>
-            <a:r>
-              <a:rPr lang="ru-RU" sz="1200" kern="1200" dirty="0">
-                <a:solidFill>
-                  <a:schemeClr val="tx1"/>
-                </a:solidFill>
-                <a:latin typeface="+mn-lt"/>
-                <a:ea typeface="+mn-ea"/>
-                <a:cs typeface="+mn-cs"/>
-              </a:rPr>
-              <a:t>Point</a:t>
-            </a:r>
-            <a:r>
-              <a:rPr lang="ru-RU" dirty="0"/>
-              <a:t>, а также функции, которые доступны для использования из других частей программы: </a:t>
-            </a:r>
-            <a:r>
-              <a:rPr lang="ru-RU" sz="1200" kern="1200" dirty="0" err="1">
-                <a:solidFill>
-                  <a:schemeClr val="tx1"/>
-                </a:solidFill>
-                <a:latin typeface="+mn-lt"/>
-                <a:ea typeface="+mn-ea"/>
-                <a:cs typeface="+mn-cs"/>
-              </a:rPr>
-              <a:t>MovePoint</a:t>
-            </a:r>
-            <a:r>
-              <a:rPr lang="ru-RU" dirty="0"/>
-              <a:t> и </a:t>
-            </a:r>
-            <a:r>
-              <a:rPr lang="ru-RU" sz="1200" kern="1200" dirty="0" err="1">
-                <a:solidFill>
-                  <a:schemeClr val="tx1"/>
-                </a:solidFill>
-                <a:latin typeface="+mn-lt"/>
-                <a:ea typeface="+mn-ea"/>
-                <a:cs typeface="+mn-cs"/>
-              </a:rPr>
-              <a:t>GetDistance</a:t>
-            </a:r>
-            <a:r>
-              <a:rPr lang="ru-RU" dirty="0"/>
-              <a:t>.</a:t>
-            </a:r>
-          </a:p>
-          <a:p>
-            <a:r>
-              <a:rPr lang="ru-RU" dirty="0"/>
-              <a:t>Важно отметить, что заголовочный файл содержит только те объявления, которые необходимы пользователю модуля. Он не содержит реализации функций и не включает лишние зависимости.</a:t>
-            </a:r>
-          </a:p>
-          <a:p>
+              <a:t>Такое разделение даёт несколько важных преимуществ.</a:t>
+            </a:r>
+          </a:p>
+          <a:p>
+            <a:pPr marL="171450" indent="-171450">
+              <a:buFont typeface="Arial" panose="020B0604020202020204" pitchFamily="34" charset="0"/>
+              <a:buChar char="•"/>
+            </a:pPr>
+            <a:r>
+              <a:rPr lang="ru-RU" dirty="0"/>
+              <a:t>Во-первых, код становится более структурированным: разные части программы физически разделены по файлам в соответствии со своей ролью.</a:t>
+            </a:r>
+          </a:p>
+          <a:p>
+            <a:pPr marL="171450" indent="-171450">
+              <a:buFont typeface="Arial" panose="020B0604020202020204" pitchFamily="34" charset="0"/>
+              <a:buChar char="•"/>
+            </a:pPr>
+            <a:r>
+              <a:rPr lang="ru-RU" dirty="0"/>
+              <a:t>Во-вторых, модуль можно повторно использовать в нескольких программах без копирования реализации.</a:t>
+            </a:r>
+          </a:p>
+          <a:p>
+            <a:pPr marL="171450" indent="-171450">
+              <a:buFont typeface="Arial" panose="020B0604020202020204" pitchFamily="34" charset="0"/>
+              <a:buChar char="•"/>
+            </a:pPr>
+            <a:r>
+              <a:rPr lang="ru-RU" dirty="0"/>
+              <a:t>В-третьих, изменение внутреннего устройства модуля не требует изменений в других файлах, если его интерфейс остаётся прежним.</a:t>
+            </a:r>
+          </a:p>
+          <a:p>
+            <a:pPr marL="171450" indent="-171450">
+              <a:buFont typeface="Arial" panose="020B0604020202020204" pitchFamily="34" charset="0"/>
+              <a:buChar char="•"/>
+            </a:pPr>
             <a:endParaRPr lang="ru-RU" dirty="0"/>
           </a:p>
           <a:p>
             <a:r>
               <a:rPr lang="ru-RU" dirty="0"/>
-              <a:t>Файл </a:t>
-            </a:r>
-            <a:r>
-              <a:rPr lang="ru-RU" sz="1200" kern="1200" dirty="0" err="1">
-                <a:solidFill>
-                  <a:schemeClr val="tx1"/>
-                </a:solidFill>
-                <a:latin typeface="+mn-lt"/>
-                <a:ea typeface="+mn-ea"/>
-                <a:cs typeface="+mn-cs"/>
-              </a:rPr>
-              <a:t>point.c</a:t>
-            </a:r>
-            <a:r>
-              <a:rPr lang="ru-RU" dirty="0"/>
-              <a:t> содержит реализацию функций. В начале файла подключается заголовочный файл </a:t>
-            </a:r>
-            <a:r>
-              <a:rPr lang="ru-RU" sz="1200" kern="1200" dirty="0" err="1">
-                <a:solidFill>
-                  <a:schemeClr val="tx1"/>
-                </a:solidFill>
-                <a:latin typeface="+mn-lt"/>
-                <a:ea typeface="+mn-ea"/>
-                <a:cs typeface="+mn-cs"/>
-              </a:rPr>
-              <a:t>point.h</a:t>
-            </a:r>
-            <a:r>
-              <a:rPr lang="ru-RU" dirty="0"/>
-              <a:t>, что позволяет компилятору проверить соответствие между объявлениями и реализациями.</a:t>
-            </a:r>
-          </a:p>
-          <a:p>
-            <a:r>
-              <a:rPr lang="ru-RU" dirty="0"/>
-              <a:t>Также в </a:t>
-            </a:r>
-            <a:r>
-              <a:rPr lang="ru-RU" sz="1200" kern="1200" dirty="0" err="1">
-                <a:solidFill>
-                  <a:schemeClr val="tx1"/>
-                </a:solidFill>
-                <a:latin typeface="+mn-lt"/>
-                <a:ea typeface="+mn-ea"/>
-                <a:cs typeface="+mn-cs"/>
-              </a:rPr>
-              <a:t>point.c</a:t>
-            </a:r>
-            <a:r>
-              <a:rPr lang="ru-RU" dirty="0"/>
-              <a:t> подключается стандартный заголовочный файл </a:t>
-            </a:r>
-            <a:r>
-              <a:rPr lang="ru-RU" sz="1200" kern="1200" dirty="0">
-                <a:solidFill>
-                  <a:schemeClr val="tx1"/>
-                </a:solidFill>
-                <a:latin typeface="+mn-lt"/>
-                <a:ea typeface="+mn-ea"/>
-                <a:cs typeface="+mn-cs"/>
-              </a:rPr>
-              <a:t>&lt;</a:t>
-            </a:r>
-            <a:r>
-              <a:rPr lang="ru-RU" sz="1200" kern="1200" dirty="0" err="1">
-                <a:solidFill>
-                  <a:schemeClr val="tx1"/>
-                </a:solidFill>
-                <a:latin typeface="+mn-lt"/>
-                <a:ea typeface="+mn-ea"/>
-                <a:cs typeface="+mn-cs"/>
-              </a:rPr>
-              <a:t>math.h</a:t>
-            </a:r>
-            <a:r>
-              <a:rPr lang="ru-RU" sz="1200" kern="1200" dirty="0">
-                <a:solidFill>
-                  <a:schemeClr val="tx1"/>
-                </a:solidFill>
-                <a:latin typeface="+mn-lt"/>
-                <a:ea typeface="+mn-ea"/>
-                <a:cs typeface="+mn-cs"/>
-              </a:rPr>
-              <a:t>&gt;</a:t>
-            </a:r>
-            <a:r>
-              <a:rPr lang="ru-RU" dirty="0"/>
-              <a:t>, поскольку для реализации функции </a:t>
-            </a:r>
-            <a:r>
-              <a:rPr lang="ru-RU" sz="1200" kern="1200" dirty="0" err="1">
-                <a:solidFill>
-                  <a:schemeClr val="tx1"/>
-                </a:solidFill>
-                <a:latin typeface="+mn-lt"/>
-                <a:ea typeface="+mn-ea"/>
-                <a:cs typeface="+mn-cs"/>
-              </a:rPr>
-              <a:t>GetDistance</a:t>
-            </a:r>
-            <a:r>
-              <a:rPr lang="ru-RU" dirty="0"/>
-              <a:t> используется функция </a:t>
-            </a:r>
-            <a:r>
-              <a:rPr lang="ru-RU" sz="1200" kern="1200" dirty="0" err="1">
-                <a:solidFill>
-                  <a:schemeClr val="tx1"/>
-                </a:solidFill>
-                <a:latin typeface="+mn-lt"/>
-                <a:ea typeface="+mn-ea"/>
-                <a:cs typeface="+mn-cs"/>
-              </a:rPr>
-              <a:t>sqrt</a:t>
-            </a:r>
-            <a:r>
-              <a:rPr lang="ru-RU" dirty="0"/>
-              <a:t>.</a:t>
-            </a:r>
-          </a:p>
-          <a:p>
-            <a:r>
-              <a:rPr lang="ru-RU" dirty="0"/>
-              <a:t>Обратите внимание на важный принцип: заголовочный файл </a:t>
-            </a:r>
-            <a:r>
-              <a:rPr lang="ru-RU" sz="1200" kern="1200" dirty="0" err="1">
-                <a:solidFill>
-                  <a:schemeClr val="tx1"/>
-                </a:solidFill>
-                <a:latin typeface="+mn-lt"/>
-                <a:ea typeface="+mn-ea"/>
-                <a:cs typeface="+mn-cs"/>
-              </a:rPr>
-              <a:t>point.h</a:t>
-            </a:r>
-            <a:r>
-              <a:rPr lang="ru-RU" dirty="0"/>
-              <a:t> не включает </a:t>
-            </a:r>
-            <a:r>
-              <a:rPr lang="ru-RU" sz="1200" kern="1200" dirty="0">
-                <a:solidFill>
-                  <a:schemeClr val="tx1"/>
-                </a:solidFill>
-                <a:latin typeface="+mn-lt"/>
-                <a:ea typeface="+mn-ea"/>
-                <a:cs typeface="+mn-cs"/>
-              </a:rPr>
-              <a:t>&lt;</a:t>
-            </a:r>
-            <a:r>
-              <a:rPr lang="ru-RU" sz="1200" kern="1200" dirty="0" err="1">
-                <a:solidFill>
-                  <a:schemeClr val="tx1"/>
-                </a:solidFill>
-                <a:latin typeface="+mn-lt"/>
-                <a:ea typeface="+mn-ea"/>
-                <a:cs typeface="+mn-cs"/>
-              </a:rPr>
-              <a:t>math.h</a:t>
-            </a:r>
-            <a:r>
-              <a:rPr lang="ru-RU" sz="1200" kern="1200" dirty="0">
-                <a:solidFill>
-                  <a:schemeClr val="tx1"/>
-                </a:solidFill>
-                <a:latin typeface="+mn-lt"/>
-                <a:ea typeface="+mn-ea"/>
-                <a:cs typeface="+mn-cs"/>
-              </a:rPr>
-              <a:t>&gt;</a:t>
-            </a:r>
-            <a:r>
-              <a:rPr lang="ru-RU" dirty="0"/>
-              <a:t>. Это связано с тем, что заголовочный файл должен содержать только те зависимости, которые необходимы для его собственной компиляции. В данном случае для объявления функций достаточно знать тип </a:t>
-            </a:r>
-            <a:r>
-              <a:rPr lang="ru-RU" sz="1200" kern="1200" dirty="0" err="1">
-                <a:solidFill>
-                  <a:schemeClr val="tx1"/>
-                </a:solidFill>
-                <a:latin typeface="+mn-lt"/>
-                <a:ea typeface="+mn-ea"/>
-                <a:cs typeface="+mn-cs"/>
-              </a:rPr>
-              <a:t>double</a:t>
-            </a:r>
-            <a:r>
-              <a:rPr lang="ru-RU" dirty="0"/>
-              <a:t>, а реализация функции </a:t>
-            </a:r>
-            <a:r>
-              <a:rPr lang="ru-RU" sz="1200" kern="1200" dirty="0" err="1">
-                <a:solidFill>
-                  <a:schemeClr val="tx1"/>
-                </a:solidFill>
-                <a:latin typeface="+mn-lt"/>
-                <a:ea typeface="+mn-ea"/>
-                <a:cs typeface="+mn-cs"/>
-              </a:rPr>
-              <a:t>sqrt</a:t>
-            </a:r>
-            <a:r>
-              <a:rPr lang="ru-RU" dirty="0"/>
-              <a:t> требуется только в </a:t>
-            </a:r>
-            <a:r>
-              <a:rPr lang="ru-RU" sz="1200" kern="1200" dirty="0">
-                <a:solidFill>
-                  <a:schemeClr val="tx1"/>
-                </a:solidFill>
-                <a:latin typeface="+mn-lt"/>
-                <a:ea typeface="+mn-ea"/>
-                <a:cs typeface="+mn-cs"/>
-              </a:rPr>
-              <a:t>.c</a:t>
-            </a:r>
-            <a:r>
-              <a:rPr lang="ru-RU" dirty="0"/>
-              <a:t> файле.</a:t>
-            </a:r>
-          </a:p>
-          <a:p>
-            <a:endParaRPr lang="ru-RU" dirty="0"/>
-          </a:p>
-          <a:p>
-            <a:r>
-              <a:rPr lang="ru-RU" dirty="0"/>
-              <a:t>Такой подход позволяет минимизировать зависимости между модулями, ускоряет компиляцию и делает структуру программы более прозрачной.</a:t>
-            </a:r>
-          </a:p>
-          <a:p>
-            <a:endParaRPr lang="ru-RU" dirty="0"/>
-          </a:p>
-          <a:p>
-            <a:r>
-              <a:rPr lang="ru-RU" dirty="0"/>
-              <a:t>Таким образом, другие файлы программы будут подключать только </a:t>
-            </a:r>
-            <a:r>
-              <a:rPr lang="ru-RU" sz="1200" kern="1200" dirty="0" err="1">
-                <a:solidFill>
-                  <a:schemeClr val="tx1"/>
-                </a:solidFill>
-                <a:latin typeface="+mn-lt"/>
-                <a:ea typeface="+mn-ea"/>
-                <a:cs typeface="+mn-cs"/>
-              </a:rPr>
-              <a:t>point.h</a:t>
-            </a:r>
-            <a:r>
-              <a:rPr lang="ru-RU" dirty="0"/>
-              <a:t> и использовать объявленные в нём функции, не зная деталей их реализации и не </a:t>
-            </a:r>
-            <a:r>
-              <a:rPr lang="ru-RU" dirty="0" err="1"/>
-              <a:t>зависа</a:t>
-            </a:r>
-            <a:r>
-              <a:rPr lang="ru-RU" dirty="0"/>
-              <a:t> от внутренних подключений модуля.</a:t>
+              <a:t>Именно поэтому модульная организация является стандартным способом построения крупных программ на языке C.</a:t>
             </a:r>
           </a:p>
           <a:p>
@@ -3045,7 +2880,7 @@
           <a:p>
             <a:fld id="{34FEEA18-11E3-42C4-8C85-DE023A8E1E76}" type="slidenum">
               <a:rPr lang="en-US" smtClean="0"/>
-              <a:t>5</a:t>
+              <a:t>4</a:t>
             </a:fld>
             <a:endParaRPr lang="en-US"/>
           </a:p>
@@ -3054,7 +2889,7 @@
     </p:spTree>
     <p:extLst>
       <p:ext uri="{BB962C8B-B14F-4D97-AF65-F5344CB8AC3E}">
-        <p14:creationId xmlns:p14="http://schemas.microsoft.com/office/powerpoint/2010/main" val="4146328213"/>
+        <p14:creationId xmlns:p14="http://schemas.microsoft.com/office/powerpoint/2010/main" val="4005276613"/>
       </p:ext>
     </p:extLst>
   </p:cSld>
@@ -3110,10 +2945,16 @@
           <a:p>
             <a:r>
               <a:rPr lang="ru-RU" dirty="0"/>
-              <a:t>Рассмотрим, почему одного разделения на несколько </a:t>
-            </a:r>
-            <a:r>
-              <a:rPr lang="ru-RU" sz="1200" kern="1200" dirty="0">
+              <a:t>Рассмотрим пример структуры модуля на языке C.</a:t>
+            </a:r>
+          </a:p>
+          <a:p>
+            <a:r>
+              <a:rPr lang="ru-RU" dirty="0"/>
+              <a:t>Модуль представлен двумя файлами: </a:t>
+            </a:r>
+            <a:r>
+              <a:rPr lang="ru-RU" sz="1200" kern="1200" dirty="0" err="1">
                 <a:solidFill>
                   <a:schemeClr val="tx1"/>
                 </a:solidFill>
@@ -3121,17 +2962,11 @@
                 <a:ea typeface="+mn-ea"/>
                 <a:cs typeface="+mn-cs"/>
               </a:rPr>
-              <a:t>.c</a:t>
-            </a:r>
-            <a:r>
-              <a:rPr lang="ru-RU" dirty="0"/>
-              <a:t> файлов недостаточно.</a:t>
-            </a:r>
-          </a:p>
-          <a:p>
-            <a:r>
-              <a:rPr lang="ru-RU" dirty="0"/>
-              <a:t>Предположим, что мы вынесли реализацию работы с точками в файл </a:t>
+              <a:t>point.h</a:t>
+            </a:r>
+            <a:r>
+              <a:rPr lang="ru-RU" dirty="0"/>
+              <a:t> и </a:t>
             </a:r>
             <a:r>
               <a:rPr lang="ru-RU" sz="1200" kern="1200" dirty="0" err="1">
@@ -3146,7 +2981,16 @@
             </a:r>
             <a:r>
               <a:rPr lang="ru-RU" dirty="0"/>
-              <a:t>, а в файле </a:t>
+              <a:t>.</a:t>
+            </a:r>
+          </a:p>
+          <a:p>
+            <a:endParaRPr lang="ru-RU" dirty="0"/>
+          </a:p>
+          <a:p>
+            <a:r>
+              <a:rPr lang="ru-RU" dirty="0"/>
+              <a:t>Заголовочный файл </a:t>
             </a:r>
             <a:r>
               <a:rPr lang="ru-RU" sz="1200" kern="1200" dirty="0" err="1">
@@ -3157,11 +3001,11 @@
                 <a:ea typeface="+mn-ea"/>
                 <a:cs typeface="+mn-cs"/>
               </a:rPr>
-              <a:t>main.c</a:t>
-            </a:r>
-            <a:r>
-              <a:rPr lang="ru-RU" dirty="0"/>
-              <a:t> пытаемся использовать тип </a:t>
+              <a:t>point.h</a:t>
+            </a:r>
+            <a:r>
+              <a:rPr lang="ru-RU" dirty="0"/>
+              <a:t> определяет интерфейс модуля. В нём объявляется структура </a:t>
             </a:r>
             <a:r>
               <a:rPr lang="ru-RU" sz="1200" kern="1200" dirty="0">
@@ -3176,7 +3020,7 @@
             </a:r>
             <a:r>
               <a:rPr lang="ru-RU" dirty="0"/>
-              <a:t> и функцию </a:t>
+              <a:t>, а также функции, которые доступны для использования из других частей программы: </a:t>
             </a:r>
             <a:r>
               <a:rPr lang="ru-RU" sz="1200" kern="1200" dirty="0" err="1">
@@ -3191,16 +3035,10 @@
             </a:r>
             <a:r>
               <a:rPr lang="ru-RU" dirty="0"/>
-              <a:t>.</a:t>
-            </a:r>
-          </a:p>
-          <a:p>
-            <a:r>
-              <a:rPr lang="ru-RU" dirty="0"/>
-              <a:t>При компиляции возникает ошибка. Компилятор сообщает, что тип </a:t>
-            </a:r>
-            <a:r>
-              <a:rPr lang="ru-RU" sz="1200" kern="1200" dirty="0">
+              <a:t> и </a:t>
+            </a:r>
+            <a:r>
+              <a:rPr lang="ru-RU" sz="1200" kern="1200" dirty="0" err="1">
                 <a:solidFill>
                   <a:schemeClr val="tx1"/>
                 </a:solidFill>
@@ -3208,11 +3046,26 @@
                 <a:ea typeface="+mn-ea"/>
                 <a:cs typeface="+mn-cs"/>
               </a:rPr>
-              <a:t>Point</a:t>
-            </a:r>
-            <a:r>
-              <a:rPr lang="ru-RU" dirty="0"/>
-              <a:t> неизвестен, а функция </a:t>
+              <a:t>GetDistance</a:t>
+            </a:r>
+            <a:r>
+              <a:rPr lang="ru-RU" dirty="0"/>
+              <a:t>.</a:t>
+            </a:r>
+          </a:p>
+          <a:p>
+            <a:r>
+              <a:rPr lang="ru-RU" dirty="0"/>
+              <a:t>Важно отметить, что заголовочный файл содержит только те объявления, которые необходимы пользователю модуля. Он не содержит реализации функций и не включает лишние зависимости.</a:t>
+            </a:r>
+          </a:p>
+          <a:p>
+            <a:endParaRPr lang="ru-RU" dirty="0"/>
+          </a:p>
+          <a:p>
+            <a:r>
+              <a:rPr lang="ru-RU" dirty="0"/>
+              <a:t>Файл </a:t>
             </a:r>
             <a:r>
               <a:rPr lang="ru-RU" sz="1200" kern="1200" dirty="0" err="1">
@@ -3223,20 +3076,14 @@
                 <a:ea typeface="+mn-ea"/>
                 <a:cs typeface="+mn-cs"/>
               </a:rPr>
-              <a:t>MovePoint</a:t>
-            </a:r>
-            <a:r>
-              <a:rPr lang="ru-RU" dirty="0"/>
-              <a:t> не объявлена.</a:t>
-            </a:r>
-          </a:p>
-          <a:p>
-            <a:r>
-              <a:rPr lang="ru-RU" dirty="0"/>
-              <a:t>Причина в том, что компилятор обрабатывает каждый </a:t>
-            </a:r>
-            <a:r>
-              <a:rPr lang="ru-RU" sz="1200" kern="1200" dirty="0">
+              <a:t>point.c</a:t>
+            </a:r>
+            <a:r>
+              <a:rPr lang="ru-RU" dirty="0"/>
+              <a:t> содержит реализацию функций. В начале файла подключается заголовочный файл </a:t>
+            </a:r>
+            <a:r>
+              <a:rPr lang="ru-RU" sz="1200" kern="1200" dirty="0" err="1">
                 <a:solidFill>
                   <a:schemeClr val="tx1"/>
                 </a:solidFill>
@@ -3244,11 +3091,17 @@
                 <a:ea typeface="+mn-ea"/>
                 <a:cs typeface="+mn-cs"/>
               </a:rPr>
-              <a:t>.c</a:t>
-            </a:r>
-            <a:r>
-              <a:rPr lang="ru-RU" dirty="0"/>
-              <a:t> файл независимо. При компиляции </a:t>
+              <a:t>point.h</a:t>
+            </a:r>
+            <a:r>
+              <a:rPr lang="ru-RU" dirty="0"/>
+              <a:t>, что позволяет компилятору проверить соответствие между объявлениями и реализациями.</a:t>
+            </a:r>
+          </a:p>
+          <a:p>
+            <a:r>
+              <a:rPr lang="ru-RU" dirty="0"/>
+              <a:t>Также в </a:t>
             </a:r>
             <a:r>
               <a:rPr lang="ru-RU" sz="1200" kern="1200" dirty="0" err="1">
@@ -3259,14 +3112,14 @@
                 <a:ea typeface="+mn-ea"/>
                 <a:cs typeface="+mn-cs"/>
               </a:rPr>
-              <a:t>main.c</a:t>
-            </a:r>
-            <a:r>
-              <a:rPr lang="ru-RU" dirty="0"/>
-              <a:t> он не имеет никакой информации о том, что находится в </a:t>
-            </a:r>
-            <a:r>
-              <a:rPr lang="ru-RU" sz="1200" kern="1200" dirty="0" err="1">
+              <a:t>point.c</a:t>
+            </a:r>
+            <a:r>
+              <a:rPr lang="ru-RU" dirty="0"/>
+              <a:t> подключается стандартный заголовочный файл </a:t>
+            </a:r>
+            <a:r>
+              <a:rPr lang="ru-RU" sz="1200" kern="1200" dirty="0">
                 <a:solidFill>
                   <a:schemeClr val="tx1"/>
                 </a:solidFill>
@@ -3274,11 +3127,207 @@
                 <a:ea typeface="+mn-ea"/>
                 <a:cs typeface="+mn-cs"/>
               </a:rPr>
-              <a:t>point.c</a:t>
+              <a:t>&lt;</a:t>
+            </a:r>
+            <a:r>
+              <a:rPr lang="ru-RU" sz="1200" kern="1200" dirty="0" err="1">
+                <a:solidFill>
+                  <a:schemeClr val="tx1"/>
+                </a:solidFill>
+                <a:latin typeface="+mn-lt"/>
+                <a:ea typeface="+mn-ea"/>
+                <a:cs typeface="+mn-cs"/>
+              </a:rPr>
+              <a:t>math.h</a:t>
+            </a:r>
+            <a:r>
+              <a:rPr lang="ru-RU" sz="1200" kern="1200" dirty="0">
+                <a:solidFill>
+                  <a:schemeClr val="tx1"/>
+                </a:solidFill>
+                <a:latin typeface="+mn-lt"/>
+                <a:ea typeface="+mn-ea"/>
+                <a:cs typeface="+mn-cs"/>
+              </a:rPr>
+              <a:t>&gt;</a:t>
+            </a:r>
+            <a:r>
+              <a:rPr lang="ru-RU" dirty="0"/>
+              <a:t>, поскольку для реализации функции </a:t>
+            </a:r>
+            <a:r>
+              <a:rPr lang="ru-RU" sz="1200" kern="1200" dirty="0" err="1">
+                <a:solidFill>
+                  <a:schemeClr val="tx1"/>
+                </a:solidFill>
+                <a:latin typeface="+mn-lt"/>
+                <a:ea typeface="+mn-ea"/>
+                <a:cs typeface="+mn-cs"/>
+              </a:rPr>
+              <a:t>GetDistance</a:t>
+            </a:r>
+            <a:r>
+              <a:rPr lang="ru-RU" dirty="0"/>
+              <a:t> используется функция </a:t>
+            </a:r>
+            <a:r>
+              <a:rPr lang="ru-RU" sz="1200" kern="1200" dirty="0" err="1">
+                <a:solidFill>
+                  <a:schemeClr val="tx1"/>
+                </a:solidFill>
+                <a:latin typeface="+mn-lt"/>
+                <a:ea typeface="+mn-ea"/>
+                <a:cs typeface="+mn-cs"/>
+              </a:rPr>
+              <a:t>sqrt</a:t>
             </a:r>
             <a:r>
               <a:rPr lang="ru-RU" dirty="0"/>
               <a:t>.</a:t>
+            </a:r>
+          </a:p>
+          <a:p>
+            <a:r>
+              <a:rPr lang="ru-RU" dirty="0"/>
+              <a:t>Обратите внимание на важный принцип: заголовочный файл </a:t>
+            </a:r>
+            <a:r>
+              <a:rPr lang="ru-RU" sz="1200" kern="1200" dirty="0" err="1">
+                <a:solidFill>
+                  <a:schemeClr val="tx1"/>
+                </a:solidFill>
+                <a:latin typeface="+mn-lt"/>
+                <a:ea typeface="+mn-ea"/>
+                <a:cs typeface="+mn-cs"/>
+              </a:rPr>
+              <a:t>point.h</a:t>
+            </a:r>
+            <a:r>
+              <a:rPr lang="ru-RU" dirty="0"/>
+              <a:t> не включает </a:t>
+            </a:r>
+            <a:r>
+              <a:rPr lang="ru-RU" sz="1200" kern="1200" dirty="0">
+                <a:solidFill>
+                  <a:schemeClr val="tx1"/>
+                </a:solidFill>
+                <a:latin typeface="+mn-lt"/>
+                <a:ea typeface="+mn-ea"/>
+                <a:cs typeface="+mn-cs"/>
+              </a:rPr>
+              <a:t>&lt;</a:t>
+            </a:r>
+            <a:r>
+              <a:rPr lang="ru-RU" sz="1200" kern="1200" dirty="0" err="1">
+                <a:solidFill>
+                  <a:schemeClr val="tx1"/>
+                </a:solidFill>
+                <a:latin typeface="+mn-lt"/>
+                <a:ea typeface="+mn-ea"/>
+                <a:cs typeface="+mn-cs"/>
+              </a:rPr>
+              <a:t>math.h</a:t>
+            </a:r>
+            <a:r>
+              <a:rPr lang="ru-RU" sz="1200" kern="1200" dirty="0">
+                <a:solidFill>
+                  <a:schemeClr val="tx1"/>
+                </a:solidFill>
+                <a:latin typeface="+mn-lt"/>
+                <a:ea typeface="+mn-ea"/>
+                <a:cs typeface="+mn-cs"/>
+              </a:rPr>
+              <a:t>&gt;</a:t>
+            </a:r>
+            <a:r>
+              <a:rPr lang="ru-RU" dirty="0"/>
+              <a:t>. Это связано с тем, что заголовочный файл должен содержать только те зависимости, которые необходимы для его собственной компиляции. В данном случае для объявления функций достаточно знать тип </a:t>
+            </a:r>
+            <a:r>
+              <a:rPr lang="ru-RU" sz="1200" kern="1200" dirty="0" err="1">
+                <a:solidFill>
+                  <a:schemeClr val="tx1"/>
+                </a:solidFill>
+                <a:latin typeface="+mn-lt"/>
+                <a:ea typeface="+mn-ea"/>
+                <a:cs typeface="+mn-cs"/>
+              </a:rPr>
+              <a:t>double</a:t>
+            </a:r>
+            <a:r>
+              <a:rPr lang="ru-RU" dirty="0"/>
+              <a:t>, а реализация функции </a:t>
+            </a:r>
+            <a:r>
+              <a:rPr lang="ru-RU" sz="1200" kern="1200" dirty="0" err="1">
+                <a:solidFill>
+                  <a:schemeClr val="tx1"/>
+                </a:solidFill>
+                <a:latin typeface="+mn-lt"/>
+                <a:ea typeface="+mn-ea"/>
+                <a:cs typeface="+mn-cs"/>
+              </a:rPr>
+              <a:t>sqrt</a:t>
+            </a:r>
+            <a:r>
+              <a:rPr lang="ru-RU" dirty="0"/>
+              <a:t> требуется только в </a:t>
+            </a:r>
+            <a:r>
+              <a:rPr lang="ru-RU" sz="1200" kern="1200" dirty="0">
+                <a:solidFill>
+                  <a:schemeClr val="tx1"/>
+                </a:solidFill>
+                <a:latin typeface="+mn-lt"/>
+                <a:ea typeface="+mn-ea"/>
+                <a:cs typeface="+mn-cs"/>
+              </a:rPr>
+              <a:t>.c</a:t>
+            </a:r>
+            <a:r>
+              <a:rPr lang="ru-RU" dirty="0"/>
+              <a:t> файле.</a:t>
+            </a:r>
+          </a:p>
+          <a:p>
+            <a:endParaRPr lang="ru-RU" dirty="0"/>
+          </a:p>
+          <a:p>
+            <a:r>
+              <a:rPr lang="ru-RU" dirty="0"/>
+              <a:t>Такой подход позволяет минимизировать зависимости между модулями, ускоряет компиляцию и делает структуру программы более прозрачной.</a:t>
+            </a:r>
+          </a:p>
+          <a:p>
+            <a:endParaRPr lang="ru-RU" dirty="0"/>
+          </a:p>
+          <a:p>
+            <a:r>
+              <a:rPr lang="ru-RU" dirty="0"/>
+              <a:t>Таким образом, другие файлы программы будут подключать только </a:t>
+            </a:r>
+            <a:r>
+              <a:rPr lang="ru-RU" sz="1200" kern="1200" dirty="0" err="1">
+                <a:solidFill>
+                  <a:schemeClr val="tx1"/>
+                </a:solidFill>
+                <a:latin typeface="+mn-lt"/>
+                <a:ea typeface="+mn-ea"/>
+                <a:cs typeface="+mn-cs"/>
+              </a:rPr>
+              <a:t>point.h</a:t>
+            </a:r>
+            <a:r>
+              <a:rPr lang="ru-RU" dirty="0"/>
+              <a:t> и использовать объявленные в нём функции, не зная деталей их реализации и не </a:t>
+            </a:r>
+            <a:r>
+              <a:rPr lang="ru-RU" dirty="0" err="1"/>
+              <a:t>зависа</a:t>
+            </a:r>
+            <a:r>
+              <a:rPr lang="ru-RU" dirty="0"/>
+              <a:t> от внутренних подключений модуля.</a:t>
             </a:r>
           </a:p>
           <a:p>
@@ -3303,7 +3352,7 @@
           <a:p>
             <a:fld id="{34FEEA18-11E3-42C4-8C85-DE023A8E1E76}" type="slidenum">
               <a:rPr lang="en-US" smtClean="0"/>
-              <a:t>6</a:t>
+              <a:t>5</a:t>
             </a:fld>
             <a:endParaRPr lang="en-US"/>
           </a:p>
@@ -3312,7 +3361,7 @@
     </p:spTree>
     <p:extLst>
       <p:ext uri="{BB962C8B-B14F-4D97-AF65-F5344CB8AC3E}">
-        <p14:creationId xmlns:p14="http://schemas.microsoft.com/office/powerpoint/2010/main" val="1851418548"/>
+        <p14:creationId xmlns:p14="http://schemas.microsoft.com/office/powerpoint/2010/main" val="4146328213"/>
       </p:ext>
     </p:extLst>
   </p:cSld>
@@ -3368,7 +3417,7 @@
           <a:p>
             <a:r>
               <a:rPr lang="ru-RU" dirty="0"/>
-              <a:t>Теоретически можно было бы продублировать объявления: вручную описать структуру </a:t>
+              <a:t>Рассмотрим, почему одного разделения на несколько </a:t>
             </a:r>
             <a:r>
               <a:rPr lang="ru-RU" sz="1200" kern="1200" dirty="0">
@@ -3379,35 +3428,20 @@
                 <a:ea typeface="+mn-ea"/>
                 <a:cs typeface="+mn-cs"/>
               </a:rPr>
-              <a:t>Point</a:t>
-            </a:r>
-            <a:r>
-              <a:rPr lang="ru-RU" dirty="0"/>
-              <a:t> и сигнатуры функций в каждом файле, где они используются.</a:t>
-            </a:r>
-          </a:p>
-          <a:p>
-            <a:r>
-              <a:rPr lang="ru-RU" dirty="0"/>
-              <a:t>Однако такой подход приводит к дублированию кода. При изменении структуры или сигнатуры функций потребуется вносить изменения во все файлы, что создаёт риск несогласованности и ошибок.</a:t>
-            </a:r>
-          </a:p>
-          <a:p>
-            <a:endParaRPr lang="ru-RU" dirty="0"/>
-          </a:p>
-          <a:p>
-            <a:r>
-              <a:rPr lang="ru-RU" dirty="0"/>
-              <a:t>Поэтому используется другой подход: все объявления, которые должны быть доступны из разных файлов, выносятся в отдельный заголовочный файл.</a:t>
-            </a:r>
-          </a:p>
-          <a:p>
-            <a:r>
-              <a:rPr lang="ru-RU" dirty="0"/>
-              <a:t>Этот файл подключается с помощью директивы </a:t>
-            </a:r>
-            <a:r>
-              <a:rPr lang="ru-RU" sz="1200" kern="1200" dirty="0">
+              <a:t>.c</a:t>
+            </a:r>
+            <a:r>
+              <a:rPr lang="ru-RU" dirty="0"/>
+              <a:t> файлов недостаточно.</a:t>
+            </a:r>
+          </a:p>
+          <a:p>
+            <a:r>
+              <a:rPr lang="ru-RU" dirty="0"/>
+              <a:t>Предположим, что мы вынесли реализацию работы с точками в файл </a:t>
+            </a:r>
+            <a:r>
+              <a:rPr lang="ru-RU" sz="1200" kern="1200" dirty="0" err="1">
                 <a:solidFill>
                   <a:schemeClr val="tx1"/>
                 </a:solidFill>
@@ -3415,14 +3449,14 @@
                 <a:ea typeface="+mn-ea"/>
                 <a:cs typeface="+mn-cs"/>
               </a:rPr>
-              <a:t>#include</a:t>
-            </a:r>
-            <a:r>
-              <a:rPr lang="ru-RU" dirty="0"/>
-              <a:t> в тех </a:t>
-            </a:r>
-            <a:r>
-              <a:rPr lang="ru-RU" sz="1200" kern="1200" dirty="0">
+              <a:t>point.c</a:t>
+            </a:r>
+            <a:r>
+              <a:rPr lang="ru-RU" dirty="0"/>
+              <a:t>, а в файле </a:t>
+            </a:r>
+            <a:r>
+              <a:rPr lang="ru-RU" sz="1200" kern="1200" dirty="0" err="1">
                 <a:solidFill>
                   <a:schemeClr val="tx1"/>
                 </a:solidFill>
@@ -3430,21 +3464,129 @@
                 <a:ea typeface="+mn-ea"/>
                 <a:cs typeface="+mn-cs"/>
               </a:rPr>
+              <a:t>main.c</a:t>
+            </a:r>
+            <a:r>
+              <a:rPr lang="ru-RU" dirty="0"/>
+              <a:t> пытаемся использовать тип </a:t>
+            </a:r>
+            <a:r>
+              <a:rPr lang="ru-RU" sz="1200" kern="1200" dirty="0">
+                <a:solidFill>
+                  <a:schemeClr val="tx1"/>
+                </a:solidFill>
+                <a:latin typeface="+mn-lt"/>
+                <a:ea typeface="+mn-ea"/>
+                <a:cs typeface="+mn-cs"/>
+              </a:rPr>
+              <a:t>Point</a:t>
+            </a:r>
+            <a:r>
+              <a:rPr lang="ru-RU" dirty="0"/>
+              <a:t> и функцию </a:t>
+            </a:r>
+            <a:r>
+              <a:rPr lang="ru-RU" sz="1200" kern="1200" dirty="0" err="1">
+                <a:solidFill>
+                  <a:schemeClr val="tx1"/>
+                </a:solidFill>
+                <a:latin typeface="+mn-lt"/>
+                <a:ea typeface="+mn-ea"/>
+                <a:cs typeface="+mn-cs"/>
+              </a:rPr>
+              <a:t>MovePoint</a:t>
+            </a:r>
+            <a:r>
+              <a:rPr lang="ru-RU" dirty="0"/>
+              <a:t>.</a:t>
+            </a:r>
+          </a:p>
+          <a:p>
+            <a:r>
+              <a:rPr lang="ru-RU" dirty="0"/>
+              <a:t>При компиляции возникает ошибка. Компилятор сообщает, что тип </a:t>
+            </a:r>
+            <a:r>
+              <a:rPr lang="ru-RU" sz="1200" kern="1200" dirty="0">
+                <a:solidFill>
+                  <a:schemeClr val="tx1"/>
+                </a:solidFill>
+                <a:latin typeface="+mn-lt"/>
+                <a:ea typeface="+mn-ea"/>
+                <a:cs typeface="+mn-cs"/>
+              </a:rPr>
+              <a:t>Point</a:t>
+            </a:r>
+            <a:r>
+              <a:rPr lang="ru-RU" dirty="0"/>
+              <a:t> неизвестен, а функция </a:t>
+            </a:r>
+            <a:r>
+              <a:rPr lang="ru-RU" sz="1200" kern="1200" dirty="0" err="1">
+                <a:solidFill>
+                  <a:schemeClr val="tx1"/>
+                </a:solidFill>
+                <a:latin typeface="+mn-lt"/>
+                <a:ea typeface="+mn-ea"/>
+                <a:cs typeface="+mn-cs"/>
+              </a:rPr>
+              <a:t>MovePoint</a:t>
+            </a:r>
+            <a:r>
+              <a:rPr lang="ru-RU" dirty="0"/>
+              <a:t> не объявлена.</a:t>
+            </a:r>
+          </a:p>
+          <a:p>
+            <a:r>
+              <a:rPr lang="ru-RU" dirty="0"/>
+              <a:t>Причина в том, что компилятор обрабатывает каждый </a:t>
+            </a:r>
+            <a:r>
+              <a:rPr lang="ru-RU" sz="1200" kern="1200" dirty="0">
+                <a:solidFill>
+                  <a:schemeClr val="tx1"/>
+                </a:solidFill>
+                <a:latin typeface="+mn-lt"/>
+                <a:ea typeface="+mn-ea"/>
+                <a:cs typeface="+mn-cs"/>
+              </a:rPr>
               <a:t>.c</a:t>
             </a:r>
             <a:r>
               <a:rPr lang="ru-RU" dirty="0"/>
-              <a:t> файлах, где требуется доступ к соответствующему модулю.</a:t>
-            </a:r>
-          </a:p>
-          <a:p>
-            <a:r>
-              <a:rPr lang="ru-RU" dirty="0"/>
-              <a:t>Таким образом, заголовочный файл обеспечивает единое и согласованное описание интерфейса модуля для всей программы.</a:t>
-            </a:r>
-          </a:p>
-          <a:p>
-            <a:endParaRPr lang="en-US" dirty="0"/>
+              <a:t> файл независимо. При компиляции </a:t>
+            </a:r>
+            <a:r>
+              <a:rPr lang="ru-RU" sz="1200" kern="1200" dirty="0" err="1">
+                <a:solidFill>
+                  <a:schemeClr val="tx1"/>
+                </a:solidFill>
+                <a:latin typeface="+mn-lt"/>
+                <a:ea typeface="+mn-ea"/>
+                <a:cs typeface="+mn-cs"/>
+              </a:rPr>
+              <a:t>main.c</a:t>
+            </a:r>
+            <a:r>
+              <a:rPr lang="ru-RU" dirty="0"/>
+              <a:t> он не имеет никакой информации о том, что находится в </a:t>
+            </a:r>
+            <a:r>
+              <a:rPr lang="ru-RU" sz="1200" kern="1200" dirty="0" err="1">
+                <a:solidFill>
+                  <a:schemeClr val="tx1"/>
+                </a:solidFill>
+                <a:latin typeface="+mn-lt"/>
+                <a:ea typeface="+mn-ea"/>
+                <a:cs typeface="+mn-cs"/>
+              </a:rPr>
+              <a:t>point.c</a:t>
+            </a:r>
+            <a:r>
+              <a:rPr lang="ru-RU" dirty="0"/>
+              <a:t>.</a:t>
+            </a:r>
           </a:p>
           <a:p>
             <a:endParaRPr lang="en-US" dirty="0"/>
@@ -3468,7 +3610,7 @@
           <a:p>
             <a:fld id="{34FEEA18-11E3-42C4-8C85-DE023A8E1E76}" type="slidenum">
               <a:rPr lang="en-US" smtClean="0"/>
-              <a:t>7</a:t>
+              <a:t>6</a:t>
             </a:fld>
             <a:endParaRPr lang="en-US"/>
           </a:p>
@@ -3477,7 +3619,7 @@
     </p:spTree>
     <p:extLst>
       <p:ext uri="{BB962C8B-B14F-4D97-AF65-F5344CB8AC3E}">
-        <p14:creationId xmlns:p14="http://schemas.microsoft.com/office/powerpoint/2010/main" val="982325867"/>
+        <p14:creationId xmlns:p14="http://schemas.microsoft.com/office/powerpoint/2010/main" val="1851418548"/>
       </p:ext>
     </p:extLst>
   </p:cSld>
@@ -3533,16 +3675,10 @@
           <a:p>
             <a:r>
               <a:rPr lang="ru-RU" dirty="0"/>
-              <a:t>Теперь рассмотрим, как на практике собирается многомодульная программа.</a:t>
-            </a:r>
-          </a:p>
-          <a:p>
-            <a:r>
-              <a:rPr lang="ru-RU" dirty="0"/>
-              <a:t>Предположим, что наша программа состоит из файлов </a:t>
-            </a:r>
-            <a:r>
-              <a:rPr lang="ru-RU" sz="1200" kern="1200" dirty="0" err="1">
+              <a:t>Теоретически можно было бы продублировать объявления: вручную описать структуру </a:t>
+            </a:r>
+            <a:r>
+              <a:rPr lang="ru-RU" sz="1200" kern="1200" dirty="0">
                 <a:solidFill>
                   <a:schemeClr val="tx1"/>
                 </a:solidFill>
@@ -3550,14 +3686,35 @@
                 <a:ea typeface="+mn-ea"/>
                 <a:cs typeface="+mn-cs"/>
               </a:rPr>
-              <a:t>main.c</a:t>
-            </a:r>
-            <a:r>
-              <a:rPr lang="ru-RU" dirty="0"/>
-              <a:t>, </a:t>
-            </a:r>
-            <a:r>
-              <a:rPr lang="ru-RU" sz="1200" kern="1200" dirty="0" err="1">
+              <a:t>Point</a:t>
+            </a:r>
+            <a:r>
+              <a:rPr lang="ru-RU" dirty="0"/>
+              <a:t> и сигнатуры функций в каждом файле, где они используются.</a:t>
+            </a:r>
+          </a:p>
+          <a:p>
+            <a:r>
+              <a:rPr lang="ru-RU" dirty="0"/>
+              <a:t>Однако такой подход приводит к дублированию кода. При изменении структуры или сигнатуры функций потребуется вносить изменения во все файлы, что создаёт риск несогласованности и ошибок.</a:t>
+            </a:r>
+          </a:p>
+          <a:p>
+            <a:endParaRPr lang="ru-RU" dirty="0"/>
+          </a:p>
+          <a:p>
+            <a:r>
+              <a:rPr lang="ru-RU" dirty="0"/>
+              <a:t>Поэтому используется другой подход: все объявления, которые должны быть доступны из разных файлов, выносятся в отдельный заголовочный файл.</a:t>
+            </a:r>
+          </a:p>
+          <a:p>
+            <a:r>
+              <a:rPr lang="ru-RU" dirty="0"/>
+              <a:t>Этот файл подключается с помощью директивы </a:t>
+            </a:r>
+            <a:r>
+              <a:rPr lang="ru-RU" sz="1200" kern="1200" dirty="0">
                 <a:solidFill>
                   <a:schemeClr val="tx1"/>
                 </a:solidFill>
@@ -3565,14 +3722,14 @@
                 <a:ea typeface="+mn-ea"/>
                 <a:cs typeface="+mn-cs"/>
               </a:rPr>
-              <a:t>point.c</a:t>
-            </a:r>
-            <a:r>
-              <a:rPr lang="ru-RU" dirty="0"/>
-              <a:t> и </a:t>
-            </a:r>
-            <a:r>
-              <a:rPr lang="ru-RU" sz="1200" kern="1200" dirty="0" err="1">
+              <a:t>#include</a:t>
+            </a:r>
+            <a:r>
+              <a:rPr lang="ru-RU" dirty="0"/>
+              <a:t> в тех </a:t>
+            </a:r>
+            <a:r>
+              <a:rPr lang="ru-RU" sz="1200" kern="1200" dirty="0">
                 <a:solidFill>
                   <a:schemeClr val="tx1"/>
                 </a:solidFill>
@@ -3580,223 +3737,23 @@
                 <a:ea typeface="+mn-ea"/>
                 <a:cs typeface="+mn-cs"/>
               </a:rPr>
-              <a:t>point.h</a:t>
-            </a:r>
-            <a:r>
-              <a:rPr lang="ru-RU" dirty="0"/>
-              <a:t>. Заголовочный файл участвует в компиляции через директиву </a:t>
-            </a:r>
-            <a:r>
-              <a:rPr lang="ru-RU" sz="1200" kern="1200" dirty="0">
-                <a:solidFill>
-                  <a:schemeClr val="tx1"/>
-                </a:solidFill>
-                <a:latin typeface="+mn-lt"/>
-                <a:ea typeface="+mn-ea"/>
-                <a:cs typeface="+mn-cs"/>
-              </a:rPr>
-              <a:t>#include</a:t>
-            </a:r>
-            <a:r>
-              <a:rPr lang="ru-RU" dirty="0"/>
-              <a:t>, но напрямую не компилируется. Компилируются именно файлы с расширением </a:t>
-            </a:r>
-            <a:r>
-              <a:rPr lang="ru-RU" sz="1200" kern="1200" dirty="0">
-                <a:solidFill>
-                  <a:schemeClr val="tx1"/>
-                </a:solidFill>
-                <a:latin typeface="+mn-lt"/>
-                <a:ea typeface="+mn-ea"/>
-                <a:cs typeface="+mn-cs"/>
-              </a:rPr>
               <a:t>.c</a:t>
             </a:r>
             <a:r>
               <a:rPr lang="ru-RU" dirty="0"/>
-              <a:t>.</a:t>
-            </a:r>
+              <a:t> файлах, где требуется доступ к соответствующему модулю.</a:t>
+            </a:r>
+          </a:p>
+          <a:p>
+            <a:r>
+              <a:rPr lang="ru-RU" dirty="0"/>
+              <a:t>Таким образом, заголовочный файл обеспечивает единое и согласованное описание интерфейса модуля для всей программы.</a:t>
+            </a:r>
+          </a:p>
+          <a:p>
             <a:endParaRPr lang="en-US" dirty="0"/>
           </a:p>
           <a:p>
-            <a:endParaRPr lang="ru-RU" dirty="0"/>
-          </a:p>
-          <a:p>
-            <a:r>
-              <a:rPr lang="ru-RU" dirty="0"/>
-              <a:t>Сборка обычно состоит из двух этапов.</a:t>
-            </a:r>
-            <a:endParaRPr lang="en-US" dirty="0"/>
-          </a:p>
-          <a:p>
-            <a:endParaRPr lang="ru-RU" dirty="0"/>
-          </a:p>
-          <a:p>
-            <a:r>
-              <a:rPr lang="ru-RU" dirty="0"/>
-              <a:t>Первый этап — компиляция каждого исходного файла в объектный файл.</a:t>
-            </a:r>
-            <a:br>
-              <a:rPr lang="ru-RU" dirty="0"/>
-            </a:br>
-            <a:r>
-              <a:rPr lang="ru-RU" dirty="0"/>
-              <a:t>Например, </a:t>
-            </a:r>
-            <a:r>
-              <a:rPr lang="ru-RU" sz="1200" kern="1200" dirty="0" err="1">
-                <a:solidFill>
-                  <a:schemeClr val="tx1"/>
-                </a:solidFill>
-                <a:latin typeface="+mn-lt"/>
-                <a:ea typeface="+mn-ea"/>
-                <a:cs typeface="+mn-cs"/>
-              </a:rPr>
-              <a:t>main.c</a:t>
-            </a:r>
-            <a:r>
-              <a:rPr lang="ru-RU" dirty="0"/>
-              <a:t> превращается в </a:t>
-            </a:r>
-            <a:r>
-              <a:rPr lang="ru-RU" sz="1200" kern="1200" dirty="0" err="1">
-                <a:solidFill>
-                  <a:schemeClr val="tx1"/>
-                </a:solidFill>
-                <a:latin typeface="+mn-lt"/>
-                <a:ea typeface="+mn-ea"/>
-                <a:cs typeface="+mn-cs"/>
-              </a:rPr>
-              <a:t>main.o</a:t>
-            </a:r>
-            <a:r>
-              <a:rPr lang="ru-RU" dirty="0"/>
-              <a:t> или </a:t>
-            </a:r>
-            <a:r>
-              <a:rPr lang="ru-RU" sz="1200" kern="1200" dirty="0">
-                <a:solidFill>
-                  <a:schemeClr val="tx1"/>
-                </a:solidFill>
-                <a:latin typeface="+mn-lt"/>
-                <a:ea typeface="+mn-ea"/>
-                <a:cs typeface="+mn-cs"/>
-              </a:rPr>
-              <a:t>main.obj</a:t>
-            </a:r>
-            <a:r>
-              <a:rPr lang="ru-RU" dirty="0"/>
-              <a:t>, а </a:t>
-            </a:r>
-            <a:r>
-              <a:rPr lang="ru-RU" sz="1200" kern="1200" dirty="0" err="1">
-                <a:solidFill>
-                  <a:schemeClr val="tx1"/>
-                </a:solidFill>
-                <a:latin typeface="+mn-lt"/>
-                <a:ea typeface="+mn-ea"/>
-                <a:cs typeface="+mn-cs"/>
-              </a:rPr>
-              <a:t>point.c</a:t>
-            </a:r>
-            <a:r>
-              <a:rPr lang="ru-RU" dirty="0"/>
-              <a:t> — в </a:t>
-            </a:r>
-            <a:r>
-              <a:rPr lang="ru-RU" sz="1200" kern="1200" dirty="0" err="1">
-                <a:solidFill>
-                  <a:schemeClr val="tx1"/>
-                </a:solidFill>
-                <a:latin typeface="+mn-lt"/>
-                <a:ea typeface="+mn-ea"/>
-                <a:cs typeface="+mn-cs"/>
-              </a:rPr>
-              <a:t>point.o</a:t>
-            </a:r>
-            <a:r>
-              <a:rPr lang="ru-RU" dirty="0"/>
-              <a:t> или </a:t>
-            </a:r>
-            <a:r>
-              <a:rPr lang="ru-RU" sz="1200" kern="1200" dirty="0">
-                <a:solidFill>
-                  <a:schemeClr val="tx1"/>
-                </a:solidFill>
-                <a:latin typeface="+mn-lt"/>
-                <a:ea typeface="+mn-ea"/>
-                <a:cs typeface="+mn-cs"/>
-              </a:rPr>
-              <a:t>point.obj</a:t>
-            </a:r>
-            <a:r>
-              <a:rPr lang="ru-RU" dirty="0"/>
-              <a:t>.</a:t>
-            </a:r>
-            <a:endParaRPr lang="en-US" dirty="0"/>
-          </a:p>
-          <a:p>
-            <a:endParaRPr lang="ru-RU" dirty="0"/>
-          </a:p>
-          <a:p>
-            <a:r>
-              <a:rPr lang="ru-RU" dirty="0"/>
-              <a:t>Второй этап — компоновка, то есть объединение объектных файлов в одну исполняемую программу.</a:t>
-            </a:r>
-          </a:p>
-          <a:p>
-            <a:r>
-              <a:rPr lang="ru-RU" dirty="0"/>
-              <a:t>На слайде показаны команды для трёх популярных компиляторов: GCC, </a:t>
-            </a:r>
-            <a:r>
-              <a:rPr lang="ru-RU" dirty="0" err="1"/>
-              <a:t>Clang</a:t>
-            </a:r>
-            <a:r>
-              <a:rPr lang="ru-RU" dirty="0"/>
-              <a:t> и MSVC.</a:t>
-            </a:r>
-            <a:endParaRPr lang="en-US" dirty="0"/>
-          </a:p>
-          <a:p>
-            <a:endParaRPr lang="ru-RU" dirty="0"/>
-          </a:p>
-          <a:p>
-            <a:r>
-              <a:rPr lang="ru-RU" dirty="0"/>
-              <a:t>Важно понимать, что каждый </a:t>
-            </a:r>
-            <a:r>
-              <a:rPr lang="ru-RU" sz="1200" kern="1200" dirty="0">
-                <a:solidFill>
-                  <a:schemeClr val="tx1"/>
-                </a:solidFill>
-                <a:latin typeface="+mn-lt"/>
-                <a:ea typeface="+mn-ea"/>
-                <a:cs typeface="+mn-cs"/>
-              </a:rPr>
-              <a:t>.c</a:t>
-            </a:r>
-            <a:r>
-              <a:rPr lang="ru-RU" dirty="0"/>
-              <a:t> файл компилируется отдельно. Это и делает возможной модульную организацию программы. После этого компоновщик объединяет полученные части и связывает вызовы функций между модулями.</a:t>
-            </a:r>
-            <a:endParaRPr lang="en-US" dirty="0"/>
-          </a:p>
-          <a:p>
-            <a:endParaRPr lang="ru-RU" dirty="0"/>
-          </a:p>
-          <a:p>
-            <a:r>
-              <a:rPr lang="ru-RU" dirty="0"/>
-              <a:t>Также многие компиляторы позволяют выполнить оба этапа одной командой. Это удобно для небольших проектов. Однако раздельная компиляция особенно важна в больших программах, поскольку позволяет пересобирать только те модули, которые были изменены.</a:t>
-            </a:r>
-          </a:p>
-          <a:p>
-            <a:br>
-              <a:rPr lang="ru-RU" dirty="0"/>
-            </a:br>
             <a:endParaRPr lang="en-US" dirty="0"/>
           </a:p>
         </p:txBody>
@@ -3818,7 +3775,7 @@
           <a:p>
             <a:fld id="{34FEEA18-11E3-42C4-8C85-DE023A8E1E76}" type="slidenum">
               <a:rPr lang="en-US" smtClean="0"/>
-              <a:t>8</a:t>
+              <a:t>7</a:t>
             </a:fld>
             <a:endParaRPr lang="en-US"/>
           </a:p>
@@ -3827,7 +3784,7 @@
     </p:spTree>
     <p:extLst>
       <p:ext uri="{BB962C8B-B14F-4D97-AF65-F5344CB8AC3E}">
-        <p14:creationId xmlns:p14="http://schemas.microsoft.com/office/powerpoint/2010/main" val="675550442"/>
+        <p14:creationId xmlns:p14="http://schemas.microsoft.com/office/powerpoint/2010/main" val="982325867"/>
       </p:ext>
     </p:extLst>
   </p:cSld>
@@ -3883,8 +3840,90 @@
           <a:p>
             <a:r>
               <a:rPr lang="ru-RU" dirty="0"/>
-              <a:t>Рассмотрим два ключевых этапа сборки программы: компиляцию и компоновку.</a:t>
-            </a:r>
+              <a:t>Теперь рассмотрим, как на практике собирается многомодульная программа.</a:t>
+            </a:r>
+          </a:p>
+          <a:p>
+            <a:r>
+              <a:rPr lang="ru-RU" dirty="0"/>
+              <a:t>Предположим, что наша программа состоит из файлов </a:t>
+            </a:r>
+            <a:r>
+              <a:rPr lang="ru-RU" sz="1200" kern="1200" dirty="0" err="1">
+                <a:solidFill>
+                  <a:schemeClr val="tx1"/>
+                </a:solidFill>
+                <a:latin typeface="+mn-lt"/>
+                <a:ea typeface="+mn-ea"/>
+                <a:cs typeface="+mn-cs"/>
+              </a:rPr>
+              <a:t>main.c</a:t>
+            </a:r>
+            <a:r>
+              <a:rPr lang="ru-RU" dirty="0"/>
+              <a:t>, </a:t>
+            </a:r>
+            <a:r>
+              <a:rPr lang="ru-RU" sz="1200" kern="1200" dirty="0" err="1">
+                <a:solidFill>
+                  <a:schemeClr val="tx1"/>
+                </a:solidFill>
+                <a:latin typeface="+mn-lt"/>
+                <a:ea typeface="+mn-ea"/>
+                <a:cs typeface="+mn-cs"/>
+              </a:rPr>
+              <a:t>point.c</a:t>
+            </a:r>
+            <a:r>
+              <a:rPr lang="ru-RU" dirty="0"/>
+              <a:t> и </a:t>
+            </a:r>
+            <a:r>
+              <a:rPr lang="ru-RU" sz="1200" kern="1200" dirty="0" err="1">
+                <a:solidFill>
+                  <a:schemeClr val="tx1"/>
+                </a:solidFill>
+                <a:latin typeface="+mn-lt"/>
+                <a:ea typeface="+mn-ea"/>
+                <a:cs typeface="+mn-cs"/>
+              </a:rPr>
+              <a:t>point.h</a:t>
+            </a:r>
+            <a:r>
+              <a:rPr lang="ru-RU" dirty="0"/>
+              <a:t>. Заголовочный файл участвует в компиляции через директиву </a:t>
+            </a:r>
+            <a:r>
+              <a:rPr lang="ru-RU" sz="1200" kern="1200" dirty="0">
+                <a:solidFill>
+                  <a:schemeClr val="tx1"/>
+                </a:solidFill>
+                <a:latin typeface="+mn-lt"/>
+                <a:ea typeface="+mn-ea"/>
+                <a:cs typeface="+mn-cs"/>
+              </a:rPr>
+              <a:t>#include</a:t>
+            </a:r>
+            <a:r>
+              <a:rPr lang="ru-RU" dirty="0"/>
+              <a:t>, но напрямую не компилируется. Компилируются именно файлы с расширением </a:t>
+            </a:r>
+            <a:r>
+              <a:rPr lang="ru-RU" sz="1200" kern="1200" dirty="0">
+                <a:solidFill>
+                  <a:schemeClr val="tx1"/>
+                </a:solidFill>
+                <a:latin typeface="+mn-lt"/>
+                <a:ea typeface="+mn-ea"/>
+                <a:cs typeface="+mn-cs"/>
+              </a:rPr>
+              <a:t>.c</a:t>
+            </a:r>
+            <a:r>
+              <a:rPr lang="ru-RU" dirty="0"/>
+              <a:t>.</a:t>
+            </a:r>
+            <a:endParaRPr lang="en-US" dirty="0"/>
           </a:p>
           <a:p>
             <a:endParaRPr lang="ru-RU" dirty="0"/>
@@ -3892,20 +3931,9 @@
           <a:p>
             <a:r>
               <a:rPr lang="ru-RU" dirty="0"/>
-              <a:t>Компилятор работает с каждым исходным файлом отдельно. Он анализирует код, проверяет корректность синтаксиса и типов, а затем преобразует исходный текст программы в объектный файл.</a:t>
-            </a:r>
-          </a:p>
-          <a:p>
-            <a:r>
-              <a:rPr lang="ru-RU" dirty="0"/>
-              <a:t>Важно подчеркнуть, что на этом этапе компилятор не имеет информации о других модулях программы. Он опирается только на те объявления, которые доступны в текущем файле, например через заголовочные файлы.</a:t>
-            </a:r>
-          </a:p>
-          <a:p>
-            <a:r>
-              <a:rPr lang="ru-RU" dirty="0"/>
-              <a:t>После компиляции мы получаем набор объектных файлов, каждый из которых содержит часть программы.</a:t>
-            </a:r>
+              <a:t>Сборка обычно состоит из двух этапов.</a:t>
+            </a:r>
+            <a:endParaRPr lang="en-US" dirty="0"/>
           </a:p>
           <a:p>
             <a:endParaRPr lang="ru-RU" dirty="0"/>
@@ -3913,20 +3941,106 @@
           <a:p>
             <a:r>
               <a:rPr lang="ru-RU" dirty="0"/>
-              <a:t>Далее в работу вступает линкер, или компоновщик. Его задача — объединить объектные файлы в единую исполняемую программу.</a:t>
-            </a:r>
-          </a:p>
-          <a:p>
-            <a:r>
-              <a:rPr lang="ru-RU" dirty="0"/>
-              <a:t>Линкер сопоставляет имена функций и переменных, используемых в одних модулях, с их реализациями в других. По сути, он «соединяет» части программы между собой.</a:t>
-            </a:r>
-          </a:p>
-          <a:p>
-            <a:r>
-              <a:rPr lang="ru-RU" dirty="0"/>
-              <a:t>Если функция была объявлена, но её реализация не найдена ни в одном из объектных файлов, возникает ошибка линковки. Это принципиально другой тип ошибки, отличающийся от ошибок компиляции.</a:t>
-            </a:r>
+              <a:t>Первый этап — компиляция каждого исходного файла в объектный файл.</a:t>
+            </a:r>
+            <a:br>
+              <a:rPr lang="ru-RU" dirty="0"/>
+            </a:br>
+            <a:r>
+              <a:rPr lang="ru-RU" dirty="0"/>
+              <a:t>Например, </a:t>
+            </a:r>
+            <a:r>
+              <a:rPr lang="ru-RU" sz="1200" kern="1200" dirty="0" err="1">
+                <a:solidFill>
+                  <a:schemeClr val="tx1"/>
+                </a:solidFill>
+                <a:latin typeface="+mn-lt"/>
+                <a:ea typeface="+mn-ea"/>
+                <a:cs typeface="+mn-cs"/>
+              </a:rPr>
+              <a:t>main.c</a:t>
+            </a:r>
+            <a:r>
+              <a:rPr lang="ru-RU" dirty="0"/>
+              <a:t> превращается в </a:t>
+            </a:r>
+            <a:r>
+              <a:rPr lang="ru-RU" sz="1200" kern="1200" dirty="0" err="1">
+                <a:solidFill>
+                  <a:schemeClr val="tx1"/>
+                </a:solidFill>
+                <a:latin typeface="+mn-lt"/>
+                <a:ea typeface="+mn-ea"/>
+                <a:cs typeface="+mn-cs"/>
+              </a:rPr>
+              <a:t>main.o</a:t>
+            </a:r>
+            <a:r>
+              <a:rPr lang="ru-RU" dirty="0"/>
+              <a:t> или </a:t>
+            </a:r>
+            <a:r>
+              <a:rPr lang="ru-RU" sz="1200" kern="1200" dirty="0">
+                <a:solidFill>
+                  <a:schemeClr val="tx1"/>
+                </a:solidFill>
+                <a:latin typeface="+mn-lt"/>
+                <a:ea typeface="+mn-ea"/>
+                <a:cs typeface="+mn-cs"/>
+              </a:rPr>
+              <a:t>main.obj</a:t>
+            </a:r>
+            <a:r>
+              <a:rPr lang="ru-RU" dirty="0"/>
+              <a:t>, а </a:t>
+            </a:r>
+            <a:r>
+              <a:rPr lang="ru-RU" sz="1200" kern="1200" dirty="0" err="1">
+                <a:solidFill>
+                  <a:schemeClr val="tx1"/>
+                </a:solidFill>
+                <a:latin typeface="+mn-lt"/>
+                <a:ea typeface="+mn-ea"/>
+                <a:cs typeface="+mn-cs"/>
+              </a:rPr>
+              <a:t>point.c</a:t>
+            </a:r>
+            <a:r>
+              <a:rPr lang="ru-RU" dirty="0"/>
+              <a:t> — в </a:t>
+            </a:r>
+            <a:r>
+              <a:rPr lang="ru-RU" sz="1200" kern="1200" dirty="0" err="1">
+                <a:solidFill>
+                  <a:schemeClr val="tx1"/>
+                </a:solidFill>
+                <a:latin typeface="+mn-lt"/>
+                <a:ea typeface="+mn-ea"/>
+                <a:cs typeface="+mn-cs"/>
+              </a:rPr>
+              <a:t>point.o</a:t>
+            </a:r>
+            <a:r>
+              <a:rPr lang="ru-RU" dirty="0"/>
+              <a:t> или </a:t>
+            </a:r>
+            <a:r>
+              <a:rPr lang="ru-RU" sz="1200" kern="1200" dirty="0">
+                <a:solidFill>
+                  <a:schemeClr val="tx1"/>
+                </a:solidFill>
+                <a:latin typeface="+mn-lt"/>
+                <a:ea typeface="+mn-ea"/>
+                <a:cs typeface="+mn-cs"/>
+              </a:rPr>
+              <a:t>point.obj</a:t>
+            </a:r>
+            <a:r>
+              <a:rPr lang="ru-RU" dirty="0"/>
+              <a:t>.</a:t>
+            </a:r>
+            <a:endParaRPr lang="en-US" dirty="0"/>
           </a:p>
           <a:p>
             <a:endParaRPr lang="ru-RU" dirty="0"/>
@@ -3934,10 +4048,62 @@
           <a:p>
             <a:r>
               <a:rPr lang="ru-RU" dirty="0"/>
-              <a:t>Таким образом, компилятор отвечает за корректность отдельных модулей, а линкер — за согласованность всей программы целиком.</a:t>
-            </a:r>
-          </a:p>
-          <a:p>
+              <a:t>Второй этап — компоновка, то есть объединение объектных файлов в одну исполняемую программу.</a:t>
+            </a:r>
+          </a:p>
+          <a:p>
+            <a:r>
+              <a:rPr lang="ru-RU" dirty="0"/>
+              <a:t>На слайде показаны команды для трёх популярных компиляторов: GCC, </a:t>
+            </a:r>
+            <a:r>
+              <a:rPr lang="ru-RU" dirty="0" err="1"/>
+              <a:t>Clang</a:t>
+            </a:r>
+            <a:r>
+              <a:rPr lang="ru-RU" dirty="0"/>
+              <a:t> и MSVC.</a:t>
+            </a:r>
+            <a:endParaRPr lang="en-US" dirty="0"/>
+          </a:p>
+          <a:p>
+            <a:endParaRPr lang="ru-RU" dirty="0"/>
+          </a:p>
+          <a:p>
+            <a:r>
+              <a:rPr lang="ru-RU" dirty="0"/>
+              <a:t>Важно понимать, что каждый </a:t>
+            </a:r>
+            <a:r>
+              <a:rPr lang="ru-RU" sz="1200" kern="1200" dirty="0">
+                <a:solidFill>
+                  <a:schemeClr val="tx1"/>
+                </a:solidFill>
+                <a:latin typeface="+mn-lt"/>
+                <a:ea typeface="+mn-ea"/>
+                <a:cs typeface="+mn-cs"/>
+              </a:rPr>
+              <a:t>.c</a:t>
+            </a:r>
+            <a:r>
+              <a:rPr lang="ru-RU" dirty="0"/>
+              <a:t> файл компилируется отдельно. Это и делает возможной модульную организацию программы. После этого компоновщик объединяет полученные части и связывает вызовы функций между модулями.</a:t>
+            </a:r>
+            <a:endParaRPr lang="en-US" dirty="0"/>
+          </a:p>
+          <a:p>
+            <a:endParaRPr lang="ru-RU" dirty="0"/>
+          </a:p>
+          <a:p>
+            <a:r>
+              <a:rPr lang="ru-RU" dirty="0"/>
+              <a:t>Также многие компиляторы позволяют выполнить оба этапа одной командой. Это удобно для небольших проектов. Однако раздельная компиляция особенно важна в больших программах, поскольку позволяет пересобирать только те модули, которые были изменены.</a:t>
+            </a:r>
+          </a:p>
+          <a:p>
+            <a:br>
+              <a:rPr lang="ru-RU" dirty="0"/>
+            </a:br>
             <a:endParaRPr lang="en-US" dirty="0"/>
           </a:p>
         </p:txBody>
@@ -3959,7 +4125,7 @@
           <a:p>
             <a:fld id="{34FEEA18-11E3-42C4-8C85-DE023A8E1E76}" type="slidenum">
               <a:rPr lang="en-US" smtClean="0"/>
-              <a:t>9</a:t>
+              <a:t>8</a:t>
             </a:fld>
             <a:endParaRPr lang="en-US"/>
           </a:p>
@@ -3968,7 +4134,7 @@
     </p:spTree>
     <p:extLst>
       <p:ext uri="{BB962C8B-B14F-4D97-AF65-F5344CB8AC3E}">
-        <p14:creationId xmlns:p14="http://schemas.microsoft.com/office/powerpoint/2010/main" val="1149347678"/>
+        <p14:creationId xmlns:p14="http://schemas.microsoft.com/office/powerpoint/2010/main" val="675550442"/>
       </p:ext>
     </p:extLst>
   </p:cSld>
@@ -4024,7 +4190,7 @@
           <a:p>
             <a:r>
               <a:rPr lang="ru-RU" dirty="0"/>
-              <a:t>Рассмотрим, как в языке C регулируется область видимости между файлами.</a:t>
+              <a:t>Рассмотрим два ключевых этапа сборки программы: компиляцию и компоновку.</a:t>
             </a:r>
           </a:p>
           <a:p>
@@ -4033,24 +4199,20 @@
           <a:p>
             <a:r>
               <a:rPr lang="ru-RU" dirty="0"/>
-              <a:t>Если глобальная переменная или функция объявлена без дополнительных ключевых слов, она имеет внешнюю область видимости. Это означает, что к ней можно обратиться из других файлов, используя ключевое слово </a:t>
-            </a:r>
-            <a:r>
-              <a:rPr lang="ru-RU" sz="1200" kern="1200" dirty="0" err="1">
-                <a:solidFill>
-                  <a:schemeClr val="tx1"/>
-                </a:solidFill>
-                <a:latin typeface="+mn-lt"/>
-                <a:ea typeface="+mn-ea"/>
-                <a:cs typeface="+mn-cs"/>
-              </a:rPr>
-              <a:t>extern</a:t>
-            </a:r>
-            <a:r>
-              <a:rPr lang="ru-RU" dirty="0"/>
-              <a:t>.</a:t>
-            </a:r>
-            <a:endParaRPr lang="en-US" dirty="0"/>
+              <a:t>Компилятор работает с каждым исходным файлом отдельно. Он анализирует код, проверяет корректность синтаксиса и типов, а затем преобразует исходный текст программы в объектный файл.</a:t>
+            </a:r>
+          </a:p>
+          <a:p>
+            <a:r>
+              <a:rPr lang="ru-RU" dirty="0"/>
+              <a:t>Важно подчеркнуть, что на этом этапе компилятор не имеет информации о других модулях программы. Он опирается только на те объявления, которые доступны в текущем файле, например через заголовочные файлы.</a:t>
+            </a:r>
+          </a:p>
+          <a:p>
+            <a:r>
+              <a:rPr lang="ru-RU" dirty="0"/>
+              <a:t>После компиляции мы получаем набор объектных файлов, каждый из которых содержит часть программы.</a:t>
+            </a:r>
           </a:p>
           <a:p>
             <a:endParaRPr lang="ru-RU" dirty="0"/>
@@ -4058,16 +4220,19 @@
           <a:p>
             <a:r>
               <a:rPr lang="ru-RU" dirty="0"/>
-              <a:t>Таким образом, разные модули могут разделять общие данные или вызывать функции друг друга.</a:t>
-            </a:r>
-          </a:p>
-          <a:p>
-            <a:endParaRPr lang="en-US" dirty="0"/>
-          </a:p>
-          <a:p>
-            <a:r>
-              <a:rPr lang="ru-RU" dirty="0"/>
-              <a:t>Однако такой подход не всегда желателен. Если внутренняя переменная или вспомогательная функция используются только внутри одного модуля, нет необходимости делать их доступными извне.</a:t>
+              <a:t>Далее в работу вступает линкер, или компоновщик. Его задача — объединить объектные файлы в единую исполняемую программу.</a:t>
+            </a:r>
+          </a:p>
+          <a:p>
+            <a:r>
+              <a:rPr lang="ru-RU" dirty="0"/>
+              <a:t>Линкер сопоставляет имена функций и переменных, используемых в одних модулях, с их реализациями в других. По сути, он «соединяет» части программы между собой.</a:t>
+            </a:r>
+          </a:p>
+          <a:p>
+            <a:r>
+              <a:rPr lang="ru-RU" dirty="0"/>
+              <a:t>Если функция была объявлена, но её реализация не найдена ни в одном из объектных файлов, возникает ошибка линковки. Это принципиально другой тип ошибки, отличающийся от ошибок компиляции.</a:t>
             </a:r>
           </a:p>
           <a:p>
@@ -4076,88 +4241,7 @@
           <a:p>
             <a:r>
               <a:rPr lang="ru-RU" dirty="0"/>
-              <a:t>Для ограничения области видимости используется ключевое слово </a:t>
-            </a:r>
-            <a:r>
-              <a:rPr lang="ru-RU" sz="1200" kern="1200" dirty="0" err="1">
-                <a:solidFill>
-                  <a:schemeClr val="tx1"/>
-                </a:solidFill>
-                <a:latin typeface="+mn-lt"/>
-                <a:ea typeface="+mn-ea"/>
-                <a:cs typeface="+mn-cs"/>
-              </a:rPr>
-              <a:t>static</a:t>
-            </a:r>
-            <a:r>
-              <a:rPr lang="ru-RU" dirty="0"/>
-              <a:t>. Переменные и функции, объявленные как </a:t>
-            </a:r>
-            <a:r>
-              <a:rPr lang="ru-RU" sz="1200" kern="1200" dirty="0" err="1">
-                <a:solidFill>
-                  <a:schemeClr val="tx1"/>
-                </a:solidFill>
-                <a:latin typeface="+mn-lt"/>
-                <a:ea typeface="+mn-ea"/>
-                <a:cs typeface="+mn-cs"/>
-              </a:rPr>
-              <a:t>static</a:t>
-            </a:r>
-            <a:r>
-              <a:rPr lang="ru-RU" dirty="0"/>
-              <a:t>, видны только внутри текущего </a:t>
-            </a:r>
-            <a:r>
-              <a:rPr lang="ru-RU" sz="1200" kern="1200" dirty="0">
-                <a:solidFill>
-                  <a:schemeClr val="tx1"/>
-                </a:solidFill>
-                <a:latin typeface="+mn-lt"/>
-                <a:ea typeface="+mn-ea"/>
-                <a:cs typeface="+mn-cs"/>
-              </a:rPr>
-              <a:t>.c</a:t>
-            </a:r>
-            <a:r>
-              <a:rPr lang="ru-RU" dirty="0"/>
-              <a:t> файла и недоступны другим модулям.</a:t>
-            </a:r>
-          </a:p>
-          <a:p>
-            <a:r>
-              <a:rPr lang="ru-RU" dirty="0"/>
-              <a:t>Это позволяет скрыть детали реализации и избежать случайного использования внутренних элементов модуля извне.</a:t>
-            </a:r>
-          </a:p>
-          <a:p>
-            <a:r>
-              <a:rPr lang="ru-RU" dirty="0"/>
-              <a:t>Таким образом, в языке C можно управлять видимостью на уровне файлов: либо делать сущности доступными всему проекту, либо ограничивать их текущим модулем.</a:t>
-            </a:r>
-          </a:p>
-          <a:p>
-            <a:endParaRPr lang="ru-RU" dirty="0"/>
-          </a:p>
-          <a:p>
-            <a:r>
-              <a:rPr lang="ru-RU" dirty="0"/>
-              <a:t>Рекомендуемый подход — делать доступными только те функции и данные, которые входят в интерфейс модуля, и скрывать всё остальное с помощью </a:t>
-            </a:r>
-            <a:r>
-              <a:rPr lang="ru-RU" sz="1200" kern="1200" dirty="0" err="1">
-                <a:solidFill>
-                  <a:schemeClr val="tx1"/>
-                </a:solidFill>
-                <a:latin typeface="+mn-lt"/>
-                <a:ea typeface="+mn-ea"/>
-                <a:cs typeface="+mn-cs"/>
-              </a:rPr>
-              <a:t>static</a:t>
-            </a:r>
-            <a:r>
-              <a:rPr lang="ru-RU" dirty="0"/>
-              <a:t>.</a:t>
+              <a:t>Таким образом, компилятор отвечает за корректность отдельных модулей, а линкер — за согласованность всей программы целиком.</a:t>
             </a:r>
           </a:p>
           <a:p>
@@ -4182,7 +4266,7 @@
           <a:p>
             <a:fld id="{34FEEA18-11E3-42C4-8C85-DE023A8E1E76}" type="slidenum">
               <a:rPr lang="en-US" smtClean="0"/>
-              <a:t>10</a:t>
+              <a:t>9</a:t>
             </a:fld>
             <a:endParaRPr lang="en-US"/>
           </a:p>
@@ -4191,7 +4275,7 @@
     </p:spTree>
     <p:extLst>
       <p:ext uri="{BB962C8B-B14F-4D97-AF65-F5344CB8AC3E}">
-        <p14:creationId xmlns:p14="http://schemas.microsoft.com/office/powerpoint/2010/main" val="371928823"/>
+        <p14:creationId xmlns:p14="http://schemas.microsoft.com/office/powerpoint/2010/main" val="1149347678"/>
       </p:ext>
     </p:extLst>
   </p:cSld>
@@ -4348,7 +4432,7 @@
           <a:p>
             <a:fld id="{D33AD024-4CB3-42A3-A180-E06791461934}" type="datetimeFigureOut">
               <a:rPr lang="en-US" smtClean="0"/>
-              <a:t>4/4/2026</a:t>
+              <a:t>6/24/2026</a:t>
             </a:fld>
             <a:endParaRPr lang="en-US"/>
           </a:p>
@@ -4546,7 +4630,7 @@
           <a:p>
             <a:fld id="{D33AD024-4CB3-42A3-A180-E06791461934}" type="datetimeFigureOut">
               <a:rPr lang="en-US" smtClean="0"/>
-              <a:t>4/4/2026</a:t>
+              <a:t>6/24/2026</a:t>
             </a:fld>
             <a:endParaRPr lang="en-US"/>
           </a:p>
@@ -4754,7 +4838,7 @@
           <a:p>
             <a:fld id="{D33AD024-4CB3-42A3-A180-E06791461934}" type="datetimeFigureOut">
               <a:rPr lang="en-US" smtClean="0"/>
-              <a:t>4/4/2026</a:t>
+              <a:t>6/24/2026</a:t>
             </a:fld>
             <a:endParaRPr lang="en-US"/>
           </a:p>
@@ -4952,7 +5036,7 @@
           <a:p>
             <a:fld id="{D33AD024-4CB3-42A3-A180-E06791461934}" type="datetimeFigureOut">
               <a:rPr lang="en-US" smtClean="0"/>
-              <a:t>4/4/2026</a:t>
+              <a:t>6/24/2026</a:t>
             </a:fld>
             <a:endParaRPr lang="en-US"/>
           </a:p>
@@ -5227,7 +5311,7 @@
           <a:p>
             <a:fld id="{D33AD024-4CB3-42A3-A180-E06791461934}" type="datetimeFigureOut">
               <a:rPr lang="en-US" smtClean="0"/>
-              <a:t>4/4/2026</a:t>
+              <a:t>6/24/2026</a:t>
             </a:fld>
             <a:endParaRPr lang="en-US"/>
           </a:p>
@@ -5492,7 +5576,7 @@
           <a:p>
             <a:fld id="{D33AD024-4CB3-42A3-A180-E06791461934}" type="datetimeFigureOut">
               <a:rPr lang="en-US" smtClean="0"/>
-              <a:t>4/4/2026</a:t>
+              <a:t>6/24/2026</a:t>
             </a:fld>
             <a:endParaRPr lang="en-US"/>
           </a:p>
@@ -5904,7 +5988,7 @@
           <a:p>
             <a:fld id="{D33AD024-4CB3-42A3-A180-E06791461934}" type="datetimeFigureOut">
               <a:rPr lang="en-US" smtClean="0"/>
-              <a:t>4/4/2026</a:t>
+              <a:t>6/24/2026</a:t>
             </a:fld>
             <a:endParaRPr lang="en-US"/>
           </a:p>
@@ -6045,7 +6129,7 @@
           <a:p>
             <a:fld id="{D33AD024-4CB3-42A3-A180-E06791461934}" type="datetimeFigureOut">
               <a:rPr lang="en-US" smtClean="0"/>
-              <a:t>4/4/2026</a:t>
+              <a:t>6/24/2026</a:t>
             </a:fld>
             <a:endParaRPr lang="en-US"/>
           </a:p>
@@ -6158,7 +6242,7 @@
           <a:p>
             <a:fld id="{D33AD024-4CB3-42A3-A180-E06791461934}" type="datetimeFigureOut">
               <a:rPr lang="en-US" smtClean="0"/>
-              <a:t>4/4/2026</a:t>
+              <a:t>6/24/2026</a:t>
             </a:fld>
             <a:endParaRPr lang="en-US"/>
           </a:p>
@@ -6469,7 +6553,7 @@
           <a:p>
             <a:fld id="{D33AD024-4CB3-42A3-A180-E06791461934}" type="datetimeFigureOut">
               <a:rPr lang="en-US" smtClean="0"/>
-              <a:t>4/4/2026</a:t>
+              <a:t>6/24/2026</a:t>
             </a:fld>
             <a:endParaRPr lang="en-US"/>
           </a:p>
@@ -6757,7 +6841,7 @@
           <a:p>
             <a:fld id="{D33AD024-4CB3-42A3-A180-E06791461934}" type="datetimeFigureOut">
               <a:rPr lang="en-US" smtClean="0"/>
-              <a:t>4/4/2026</a:t>
+              <a:t>6/24/2026</a:t>
             </a:fld>
             <a:endParaRPr lang="en-US"/>
           </a:p>
@@ -6998,7 +7082,7 @@
           <a:p>
             <a:fld id="{D33AD024-4CB3-42A3-A180-E06791461934}" type="datetimeFigureOut">
               <a:rPr lang="en-US" smtClean="0"/>
-              <a:t>4/4/2026</a:t>
+              <a:t>6/24/2026</a:t>
             </a:fld>
             <a:endParaRPr lang="en-US"/>
           </a:p>
